--- a/frontend/public/MarkIt_Attendance_System_Presentation.pptx
+++ b/frontend/public/MarkIt_Attendance_System_Presentation.pptx
@@ -146,7 +146,7 @@
       </p:grpSpPr>
       <p:sp>
         <p:nvSpPr>
-          <p:cNvPr id="945172532" name="Header Placeholder 1"/>
+          <p:cNvPr id="1791325782" name="Header Placeholder 1"/>
           <p:cNvSpPr>
             <a:spLocks noGrp="1"/>
           </p:cNvSpPr>
@@ -180,7 +180,7 @@
       </p:sp>
       <p:sp>
         <p:nvSpPr>
-          <p:cNvPr id="252075025" name="Date Placeholder 2"/>
+          <p:cNvPr id="1743697947" name="Date Placeholder 2"/>
           <p:cNvSpPr>
             <a:spLocks noGrp="1"/>
           </p:cNvSpPr>
@@ -218,7 +218,7 @@
       </p:sp>
       <p:sp>
         <p:nvSpPr>
-          <p:cNvPr id="263246732" name="Slide Image Placeholder 3"/>
+          <p:cNvPr id="920975893" name="Slide Image Placeholder 3"/>
           <p:cNvSpPr>
             <a:spLocks noChangeAspect="1" noGrp="1" noRot="1"/>
           </p:cNvSpPr>
@@ -254,7 +254,7 @@
       </p:sp>
       <p:sp>
         <p:nvSpPr>
-          <p:cNvPr id="1806100339" name="Notes Placeholder 4"/>
+          <p:cNvPr id="777261767" name="Notes Placeholder 4"/>
           <p:cNvSpPr>
             <a:spLocks noGrp="1"/>
           </p:cNvSpPr>
@@ -328,7 +328,7 @@
       </p:sp>
       <p:sp>
         <p:nvSpPr>
-          <p:cNvPr id="85359993" name="Footer Placeholder 5"/>
+          <p:cNvPr id="1433776198" name="Footer Placeholder 5"/>
           <p:cNvSpPr>
             <a:spLocks noGrp="1"/>
           </p:cNvSpPr>
@@ -362,7 +362,7 @@
       </p:sp>
       <p:sp>
         <p:nvSpPr>
-          <p:cNvPr id="1341225976" name="Slide Number Placeholder 6"/>
+          <p:cNvPr id="805599067" name="Slide Number Placeholder 6"/>
           <p:cNvSpPr>
             <a:spLocks noGrp="1"/>
           </p:cNvSpPr>
@@ -515,7 +515,7 @@
       </p:grpSpPr>
       <p:sp>
         <p:nvSpPr>
-          <p:cNvPr id="1600289931" name="Slide Image Placeholder 1"/>
+          <p:cNvPr id="1512847766" name="Slide Image Placeholder 1"/>
           <p:cNvSpPr>
             <a:spLocks noChangeAspect="1" noGrp="1" noRot="1"/>
           </p:cNvSpPr>
@@ -527,7 +527,7 @@
       </p:sp>
       <p:sp>
         <p:nvSpPr>
-          <p:cNvPr id="1523761229" name="Notes Placeholder 2"/>
+          <p:cNvPr id="1511323568" name="Notes Placeholder 2"/>
           <p:cNvSpPr>
             <a:spLocks noGrp="1"/>
           </p:cNvSpPr>
@@ -549,7 +549,7 @@
       </p:sp>
       <p:sp>
         <p:nvSpPr>
-          <p:cNvPr id="1481066312" name="Slide Number Placeholder 3"/>
+          <p:cNvPr id="223646171" name="Slide Number Placeholder 3"/>
           <p:cNvSpPr>
             <a:spLocks noGrp="1"/>
           </p:cNvSpPr>
@@ -600,7 +600,7 @@
       </p:grpSpPr>
       <p:sp>
         <p:nvSpPr>
-          <p:cNvPr id="1161829922" name="Slide Image Placeholder 1"/>
+          <p:cNvPr id="788674373" name="Slide Image Placeholder 1"/>
           <p:cNvSpPr>
             <a:spLocks noChangeAspect="1" noGrp="1" noRot="1"/>
           </p:cNvSpPr>
@@ -612,7 +612,7 @@
       </p:sp>
       <p:sp>
         <p:nvSpPr>
-          <p:cNvPr id="26230661" name="Notes Placeholder 2"/>
+          <p:cNvPr id="2091116069" name="Notes Placeholder 2"/>
           <p:cNvSpPr>
             <a:spLocks noGrp="1"/>
           </p:cNvSpPr>
@@ -638,7 +638,7 @@
       </p:sp>
       <p:sp>
         <p:nvSpPr>
-          <p:cNvPr id="1665736499" name="Slide Number Placeholder 3"/>
+          <p:cNvPr id="1183711699" name="Slide Number Placeholder 3"/>
           <p:cNvSpPr>
             <a:spLocks noGrp="1"/>
           </p:cNvSpPr>
@@ -689,7 +689,7 @@
       </p:grpSpPr>
       <p:sp>
         <p:nvSpPr>
-          <p:cNvPr id="832439537" name="Slide Image Placeholder 1"/>
+          <p:cNvPr id="618903105" name="Slide Image Placeholder 1"/>
           <p:cNvSpPr>
             <a:spLocks noChangeAspect="1" noGrp="1" noRot="1"/>
           </p:cNvSpPr>
@@ -701,7 +701,7 @@
       </p:sp>
       <p:sp>
         <p:nvSpPr>
-          <p:cNvPr id="1816047051" name="Notes Placeholder 2"/>
+          <p:cNvPr id="861829296" name="Notes Placeholder 2"/>
           <p:cNvSpPr>
             <a:spLocks noGrp="1"/>
           </p:cNvSpPr>
@@ -727,7 +727,7 @@
       </p:sp>
       <p:sp>
         <p:nvSpPr>
-          <p:cNvPr id="1102973435" name="Slide Number Placeholder 3"/>
+          <p:cNvPr id="1501071237" name="Slide Number Placeholder 3"/>
           <p:cNvSpPr>
             <a:spLocks noGrp="1"/>
           </p:cNvSpPr>
@@ -778,7 +778,7 @@
       </p:grpSpPr>
       <p:sp>
         <p:nvSpPr>
-          <p:cNvPr id="1803447803" name="Slide Image Placeholder 1"/>
+          <p:cNvPr id="1703381909" name="Slide Image Placeholder 1"/>
           <p:cNvSpPr>
             <a:spLocks noChangeAspect="1" noGrp="1" noRot="1"/>
           </p:cNvSpPr>
@@ -790,7 +790,7 @@
       </p:sp>
       <p:sp>
         <p:nvSpPr>
-          <p:cNvPr id="235174640" name="Notes Placeholder 2"/>
+          <p:cNvPr id="518052110" name="Notes Placeholder 2"/>
           <p:cNvSpPr>
             <a:spLocks noGrp="1"/>
           </p:cNvSpPr>
@@ -816,7 +816,7 @@
       </p:sp>
       <p:sp>
         <p:nvSpPr>
-          <p:cNvPr id="1749085215" name="Slide Number Placeholder 3"/>
+          <p:cNvPr id="629429813" name="Slide Number Placeholder 3"/>
           <p:cNvSpPr>
             <a:spLocks noGrp="1"/>
           </p:cNvSpPr>
@@ -867,7 +867,7 @@
       </p:grpSpPr>
       <p:sp>
         <p:nvSpPr>
-          <p:cNvPr id="1969596187" name="Slide Image Placeholder 1"/>
+          <p:cNvPr id="1761814199" name="Slide Image Placeholder 1"/>
           <p:cNvSpPr>
             <a:spLocks noChangeAspect="1" noGrp="1" noRot="1"/>
           </p:cNvSpPr>
@@ -879,7 +879,7 @@
       </p:sp>
       <p:sp>
         <p:nvSpPr>
-          <p:cNvPr id="1771275398" name="Notes Placeholder 2"/>
+          <p:cNvPr id="1146905804" name="Notes Placeholder 2"/>
           <p:cNvSpPr>
             <a:spLocks noGrp="1"/>
           </p:cNvSpPr>
@@ -905,7 +905,7 @@
       </p:sp>
       <p:sp>
         <p:nvSpPr>
-          <p:cNvPr id="1141731018" name="Slide Number Placeholder 3"/>
+          <p:cNvPr id="90971393" name="Slide Number Placeholder 3"/>
           <p:cNvSpPr>
             <a:spLocks noGrp="1"/>
           </p:cNvSpPr>
@@ -956,7 +956,7 @@
       </p:grpSpPr>
       <p:sp>
         <p:nvSpPr>
-          <p:cNvPr id="172913890" name="Slide Image Placeholder 1"/>
+          <p:cNvPr id="2026456056" name="Slide Image Placeholder 1"/>
           <p:cNvSpPr>
             <a:spLocks noChangeAspect="1" noGrp="1" noRot="1"/>
           </p:cNvSpPr>
@@ -968,7 +968,7 @@
       </p:sp>
       <p:sp>
         <p:nvSpPr>
-          <p:cNvPr id="1419202655" name="Notes Placeholder 2"/>
+          <p:cNvPr id="107678941" name="Notes Placeholder 2"/>
           <p:cNvSpPr>
             <a:spLocks noGrp="1"/>
           </p:cNvSpPr>
@@ -994,7 +994,7 @@
       </p:sp>
       <p:sp>
         <p:nvSpPr>
-          <p:cNvPr id="1427636073" name="Slide Number Placeholder 3"/>
+          <p:cNvPr id="1564199878" name="Slide Number Placeholder 3"/>
           <p:cNvSpPr>
             <a:spLocks noGrp="1"/>
           </p:cNvSpPr>
@@ -1045,7 +1045,7 @@
       </p:grpSpPr>
       <p:sp>
         <p:nvSpPr>
-          <p:cNvPr id="1906355750" name="Slide Image Placeholder 1"/>
+          <p:cNvPr id="1177948446" name="Slide Image Placeholder 1"/>
           <p:cNvSpPr>
             <a:spLocks noChangeAspect="1" noGrp="1" noRot="1"/>
           </p:cNvSpPr>
@@ -1057,7 +1057,7 @@
       </p:sp>
       <p:sp>
         <p:nvSpPr>
-          <p:cNvPr id="2064792586" name="Notes Placeholder 2"/>
+          <p:cNvPr id="49830159" name="Notes Placeholder 2"/>
           <p:cNvSpPr>
             <a:spLocks noGrp="1"/>
           </p:cNvSpPr>
@@ -1083,7 +1083,7 @@
       </p:sp>
       <p:sp>
         <p:nvSpPr>
-          <p:cNvPr id="9698737" name="Slide Number Placeholder 3"/>
+          <p:cNvPr id="17824205" name="Slide Number Placeholder 3"/>
           <p:cNvSpPr>
             <a:spLocks noGrp="1"/>
           </p:cNvSpPr>
@@ -1134,7 +1134,7 @@
       </p:grpSpPr>
       <p:sp>
         <p:nvSpPr>
-          <p:cNvPr id="637271330" name="Slide Image Placeholder 1"/>
+          <p:cNvPr id="103833538" name="Slide Image Placeholder 1"/>
           <p:cNvSpPr>
             <a:spLocks noChangeAspect="1" noGrp="1" noRot="1"/>
           </p:cNvSpPr>
@@ -1146,7 +1146,7 @@
       </p:sp>
       <p:sp>
         <p:nvSpPr>
-          <p:cNvPr id="1867263986" name="Notes Placeholder 2"/>
+          <p:cNvPr id="1805791465" name="Notes Placeholder 2"/>
           <p:cNvSpPr>
             <a:spLocks noGrp="1"/>
           </p:cNvSpPr>
@@ -1172,7 +1172,7 @@
       </p:sp>
       <p:sp>
         <p:nvSpPr>
-          <p:cNvPr id="1711229136" name="Slide Number Placeholder 3"/>
+          <p:cNvPr id="571424012" name="Slide Number Placeholder 3"/>
           <p:cNvSpPr>
             <a:spLocks noGrp="1"/>
           </p:cNvSpPr>
@@ -1223,7 +1223,7 @@
       </p:grpSpPr>
       <p:sp>
         <p:nvSpPr>
-          <p:cNvPr id="833227386" name="Slide Image Placeholder 1"/>
+          <p:cNvPr id="2015462450" name="Slide Image Placeholder 1"/>
           <p:cNvSpPr>
             <a:spLocks noChangeAspect="1" noGrp="1" noRot="1"/>
           </p:cNvSpPr>
@@ -1235,7 +1235,7 @@
       </p:sp>
       <p:sp>
         <p:nvSpPr>
-          <p:cNvPr id="781750622" name="Notes Placeholder 2"/>
+          <p:cNvPr id="391256384" name="Notes Placeholder 2"/>
           <p:cNvSpPr>
             <a:spLocks noGrp="1"/>
           </p:cNvSpPr>
@@ -1261,7 +1261,7 @@
       </p:sp>
       <p:sp>
         <p:nvSpPr>
-          <p:cNvPr id="346605165" name="Slide Number Placeholder 3"/>
+          <p:cNvPr id="1468094947" name="Slide Number Placeholder 3"/>
           <p:cNvSpPr>
             <a:spLocks noGrp="1"/>
           </p:cNvSpPr>
@@ -1312,7 +1312,7 @@
       </p:grpSpPr>
       <p:sp>
         <p:nvSpPr>
-          <p:cNvPr id="1982353404" name="Slide Image Placeholder 1"/>
+          <p:cNvPr id="23604954" name="Slide Image Placeholder 1"/>
           <p:cNvSpPr>
             <a:spLocks noChangeAspect="1" noGrp="1" noRot="1"/>
           </p:cNvSpPr>
@@ -1324,7 +1324,7 @@
       </p:sp>
       <p:sp>
         <p:nvSpPr>
-          <p:cNvPr id="615290030" name="Notes Placeholder 2"/>
+          <p:cNvPr id="505094367" name="Notes Placeholder 2"/>
           <p:cNvSpPr>
             <a:spLocks noGrp="1"/>
           </p:cNvSpPr>
@@ -1350,7 +1350,7 @@
       </p:sp>
       <p:sp>
         <p:nvSpPr>
-          <p:cNvPr id="1187380138" name="Slide Number Placeholder 3"/>
+          <p:cNvPr id="1047795548" name="Slide Number Placeholder 3"/>
           <p:cNvSpPr>
             <a:spLocks noGrp="1"/>
           </p:cNvSpPr>
@@ -1401,7 +1401,7 @@
       </p:grpSpPr>
       <p:sp>
         <p:nvSpPr>
-          <p:cNvPr id="1798877638" name="Slide Image Placeholder 1"/>
+          <p:cNvPr id="2076870214" name="Slide Image Placeholder 1"/>
           <p:cNvSpPr>
             <a:spLocks noChangeAspect="1" noGrp="1" noRot="1"/>
           </p:cNvSpPr>
@@ -1413,7 +1413,7 @@
       </p:sp>
       <p:sp>
         <p:nvSpPr>
-          <p:cNvPr id="355719834" name="Notes Placeholder 2"/>
+          <p:cNvPr id="2053568539" name="Notes Placeholder 2"/>
           <p:cNvSpPr>
             <a:spLocks noGrp="1"/>
           </p:cNvSpPr>
@@ -1439,7 +1439,7 @@
       </p:sp>
       <p:sp>
         <p:nvSpPr>
-          <p:cNvPr id="1517672446" name="Slide Number Placeholder 3"/>
+          <p:cNvPr id="600907125" name="Slide Number Placeholder 3"/>
           <p:cNvSpPr>
             <a:spLocks noGrp="1"/>
           </p:cNvSpPr>
@@ -1490,7 +1490,7 @@
       </p:grpSpPr>
       <p:sp>
         <p:nvSpPr>
-          <p:cNvPr id="50763878" name="Slide Image Placeholder 1"/>
+          <p:cNvPr id="1965154493" name="Slide Image Placeholder 1"/>
           <p:cNvSpPr>
             <a:spLocks noChangeAspect="1" noGrp="1" noRot="1"/>
           </p:cNvSpPr>
@@ -1502,7 +1502,7 @@
       </p:sp>
       <p:sp>
         <p:nvSpPr>
-          <p:cNvPr id="606819276" name="Notes Placeholder 2"/>
+          <p:cNvPr id="1554103685" name="Notes Placeholder 2"/>
           <p:cNvSpPr>
             <a:spLocks noGrp="1"/>
           </p:cNvSpPr>
@@ -1528,7 +1528,7 @@
       </p:sp>
       <p:sp>
         <p:nvSpPr>
-          <p:cNvPr id="174190461" name="Slide Number Placeholder 3"/>
+          <p:cNvPr id="2058869422" name="Slide Number Placeholder 3"/>
           <p:cNvSpPr>
             <a:spLocks noGrp="1"/>
           </p:cNvSpPr>
@@ -1579,7 +1579,7 @@
       </p:grpSpPr>
       <p:sp>
         <p:nvSpPr>
-          <p:cNvPr id="563695607" name="Slide Image Placeholder 1"/>
+          <p:cNvPr id="1813796474" name="Slide Image Placeholder 1"/>
           <p:cNvSpPr>
             <a:spLocks noChangeAspect="1" noGrp="1" noRot="1"/>
           </p:cNvSpPr>
@@ -1591,7 +1591,7 @@
       </p:sp>
       <p:sp>
         <p:nvSpPr>
-          <p:cNvPr id="251671370" name="Notes Placeholder 2"/>
+          <p:cNvPr id="1679243715" name="Notes Placeholder 2"/>
           <p:cNvSpPr>
             <a:spLocks noGrp="1"/>
           </p:cNvSpPr>
@@ -1617,7 +1617,7 @@
       </p:sp>
       <p:sp>
         <p:nvSpPr>
-          <p:cNvPr id="850033919" name="Slide Number Placeholder 3"/>
+          <p:cNvPr id="1112643116" name="Slide Number Placeholder 3"/>
           <p:cNvSpPr>
             <a:spLocks noGrp="1"/>
           </p:cNvSpPr>
@@ -1668,7 +1668,7 @@
       </p:grpSpPr>
       <p:sp>
         <p:nvSpPr>
-          <p:cNvPr id="1196360053" name="Slide Image Placeholder 1"/>
+          <p:cNvPr id="880731146" name="Slide Image Placeholder 1"/>
           <p:cNvSpPr>
             <a:spLocks noChangeAspect="1" noGrp="1" noRot="1"/>
           </p:cNvSpPr>
@@ -1680,7 +1680,7 @@
       </p:sp>
       <p:sp>
         <p:nvSpPr>
-          <p:cNvPr id="556391503" name="Notes Placeholder 2"/>
+          <p:cNvPr id="1455521671" name="Notes Placeholder 2"/>
           <p:cNvSpPr>
             <a:spLocks noGrp="1"/>
           </p:cNvSpPr>
@@ -1706,7 +1706,7 @@
       </p:sp>
       <p:sp>
         <p:nvSpPr>
-          <p:cNvPr id="393259291" name="Slide Number Placeholder 3"/>
+          <p:cNvPr id="82719017" name="Slide Number Placeholder 3"/>
           <p:cNvSpPr>
             <a:spLocks noGrp="1"/>
           </p:cNvSpPr>
@@ -1757,7 +1757,7 @@
       </p:grpSpPr>
       <p:sp>
         <p:nvSpPr>
-          <p:cNvPr id="1955455423" name="Slide Image Placeholder 1"/>
+          <p:cNvPr id="268222681" name="Slide Image Placeholder 1"/>
           <p:cNvSpPr>
             <a:spLocks noChangeAspect="1" noGrp="1" noRot="1"/>
           </p:cNvSpPr>
@@ -1769,7 +1769,7 @@
       </p:sp>
       <p:sp>
         <p:nvSpPr>
-          <p:cNvPr id="1879940943" name="Notes Placeholder 2"/>
+          <p:cNvPr id="3265748" name="Notes Placeholder 2"/>
           <p:cNvSpPr>
             <a:spLocks noGrp="1"/>
           </p:cNvSpPr>
@@ -1795,7 +1795,7 @@
       </p:sp>
       <p:sp>
         <p:nvSpPr>
-          <p:cNvPr id="1764760700" name="Slide Number Placeholder 3"/>
+          <p:cNvPr id="255665506" name="Slide Number Placeholder 3"/>
           <p:cNvSpPr>
             <a:spLocks noGrp="1"/>
           </p:cNvSpPr>
@@ -1846,7 +1846,7 @@
       </p:grpSpPr>
       <p:sp>
         <p:nvSpPr>
-          <p:cNvPr id="217517495" name="Slide Image Placeholder 1"/>
+          <p:cNvPr id="1554017178" name="Slide Image Placeholder 1"/>
           <p:cNvSpPr>
             <a:spLocks noChangeAspect="1" noGrp="1" noRot="1"/>
           </p:cNvSpPr>
@@ -1858,7 +1858,7 @@
       </p:sp>
       <p:sp>
         <p:nvSpPr>
-          <p:cNvPr id="289000217" name="Notes Placeholder 2"/>
+          <p:cNvPr id="1170220919" name="Notes Placeholder 2"/>
           <p:cNvSpPr>
             <a:spLocks noGrp="1"/>
           </p:cNvSpPr>
@@ -1884,7 +1884,7 @@
       </p:sp>
       <p:sp>
         <p:nvSpPr>
-          <p:cNvPr id="570150475" name="Slide Number Placeholder 3"/>
+          <p:cNvPr id="373711437" name="Slide Number Placeholder 3"/>
           <p:cNvSpPr>
             <a:spLocks noGrp="1"/>
           </p:cNvSpPr>
@@ -2249,7 +2249,7 @@
       </p:grpSpPr>
       <p:pic>
         <p:nvPicPr>
-          <p:cNvPr id="836996665" name="Image 0" descr="preencoded.png"/>
+          <p:cNvPr id="282348776" name="Image 0" descr="preencoded.png"/>
           <p:cNvPicPr>
             <a:picLocks noChangeAspect="1"/>
           </p:cNvPicPr>
@@ -2271,7 +2271,7 @@
       </p:pic>
       <p:pic>
         <p:nvPicPr>
-          <p:cNvPr id="1585500212" name="Image 1" descr="preencoded.png"/>
+          <p:cNvPr id="1154178265" name="Image 1" descr="preencoded.png"/>
           <p:cNvPicPr>
             <a:picLocks noChangeAspect="1"/>
           </p:cNvPicPr>
@@ -2293,7 +2293,7 @@
       </p:pic>
       <p:sp>
         <p:nvSpPr>
-          <p:cNvPr id="1865297945" name="Text 0"/>
+          <p:cNvPr id="1603009847" name="Text 0"/>
           <p:cNvSpPr/>
           <p:nvPr/>
         </p:nvSpPr>
@@ -2333,7 +2333,7 @@
       </p:sp>
       <p:sp>
         <p:nvSpPr>
-          <p:cNvPr id="567840829" name="Text 1"/>
+          <p:cNvPr id="1050836561" name="Text 1"/>
           <p:cNvSpPr/>
           <p:nvPr/>
         </p:nvSpPr>
@@ -2373,7 +2373,7 @@
       </p:sp>
       <p:sp>
         <p:nvSpPr>
-          <p:cNvPr id="2073651439" name="Text 2"/>
+          <p:cNvPr id="1317015584" name="Text 2"/>
           <p:cNvSpPr/>
           <p:nvPr/>
         </p:nvSpPr>
@@ -2413,7 +2413,7 @@
       </p:sp>
       <p:sp>
         <p:nvSpPr>
-          <p:cNvPr id="1834278445" name="Text 3"/>
+          <p:cNvPr id="299030792" name="Text 3"/>
           <p:cNvSpPr/>
           <p:nvPr/>
         </p:nvSpPr>
@@ -2493,7 +2493,7 @@
       </p:grpSpPr>
       <p:sp>
         <p:nvSpPr>
-          <p:cNvPr id="1974829462" name="Text 0"/>
+          <p:cNvPr id="441520487" name="Text 0"/>
           <p:cNvSpPr/>
           <p:nvPr/>
         </p:nvSpPr>
@@ -2533,7 +2533,7 @@
       </p:sp>
       <p:sp>
         <p:nvSpPr>
-          <p:cNvPr id="1606218660" name="Text 1"/>
+          <p:cNvPr id="631349035" name="Text 1"/>
           <p:cNvSpPr/>
           <p:nvPr/>
         </p:nvSpPr>
@@ -2573,7 +2573,7 @@
       </p:sp>
       <p:sp>
         <p:nvSpPr>
-          <p:cNvPr id="1140993202" name="Text 2"/>
+          <p:cNvPr id="1048564005" name="Text 2"/>
           <p:cNvSpPr/>
           <p:nvPr/>
         </p:nvSpPr>
@@ -2613,7 +2613,7 @@
       </p:sp>
       <p:pic>
         <p:nvPicPr>
-          <p:cNvPr id="1031153250" name="Image 0" descr="preencoded.png"/>
+          <p:cNvPr id="1774270635" name="Image 0" descr="preencoded.png"/>
           <p:cNvPicPr>
             <a:picLocks noChangeAspect="1"/>
           </p:cNvPicPr>
@@ -2635,7 +2635,7 @@
       </p:pic>
       <p:sp>
         <p:nvSpPr>
-          <p:cNvPr id="2090664528" name="Text 3"/>
+          <p:cNvPr id="64775785" name="Text 3"/>
           <p:cNvSpPr/>
           <p:nvPr/>
         </p:nvSpPr>
@@ -2675,7 +2675,7 @@
       </p:sp>
       <p:sp>
         <p:nvSpPr>
-          <p:cNvPr id="250362132" name="Text 4"/>
+          <p:cNvPr id="226077951" name="Text 4"/>
           <p:cNvSpPr/>
           <p:nvPr/>
         </p:nvSpPr>
@@ -2715,7 +2715,7 @@
       </p:sp>
       <p:pic>
         <p:nvPicPr>
-          <p:cNvPr id="1005028046" name="Image 1" descr="preencoded.png"/>
+          <p:cNvPr id="946223020" name="Image 1" descr="preencoded.png"/>
           <p:cNvPicPr>
             <a:picLocks noChangeAspect="1"/>
           </p:cNvPicPr>
@@ -2737,7 +2737,7 @@
       </p:pic>
       <p:sp>
         <p:nvSpPr>
-          <p:cNvPr id="299948212" name="Text 5"/>
+          <p:cNvPr id="1803504265" name="Text 5"/>
           <p:cNvSpPr/>
           <p:nvPr/>
         </p:nvSpPr>
@@ -2777,7 +2777,7 @@
       </p:sp>
       <p:sp>
         <p:nvSpPr>
-          <p:cNvPr id="1417097773" name="Text 6"/>
+          <p:cNvPr id="578233338" name="Text 6"/>
           <p:cNvSpPr/>
           <p:nvPr/>
         </p:nvSpPr>
@@ -2817,7 +2817,7 @@
       </p:sp>
       <p:sp>
         <p:nvSpPr>
-          <p:cNvPr id="169491261" name="Text 7"/>
+          <p:cNvPr id="1315359557" name="Text 7"/>
           <p:cNvSpPr/>
           <p:nvPr/>
         </p:nvSpPr>
@@ -2857,7 +2857,7 @@
       </p:sp>
       <p:sp>
         <p:nvSpPr>
-          <p:cNvPr id="380120552" name="Shape 8"/>
+          <p:cNvPr id="2145275917" name="Shape 8"/>
           <p:cNvSpPr/>
           <p:nvPr/>
         </p:nvSpPr>
@@ -2879,7 +2879,7 @@
       </p:sp>
       <p:pic>
         <p:nvPicPr>
-          <p:cNvPr id="600066752" name="Image 2" descr="preencoded.png"/>
+          <p:cNvPr id="327065766" name="Image 2" descr="preencoded.png"/>
           <p:cNvPicPr>
             <a:picLocks noChangeAspect="1"/>
           </p:cNvPicPr>
@@ -2901,7 +2901,7 @@
       </p:pic>
       <p:sp>
         <p:nvSpPr>
-          <p:cNvPr id="1773416058" name="Text 9"/>
+          <p:cNvPr id="1701448928" name="Text 9"/>
           <p:cNvSpPr/>
           <p:nvPr/>
         </p:nvSpPr>
@@ -2941,7 +2941,7 @@
       </p:sp>
       <p:sp>
         <p:nvSpPr>
-          <p:cNvPr id="1678604866" name="Text 10"/>
+          <p:cNvPr id="1594500096" name="Text 10"/>
           <p:cNvSpPr/>
           <p:nvPr/>
         </p:nvSpPr>
@@ -2981,7 +2981,7 @@
       </p:sp>
       <p:sp>
         <p:nvSpPr>
-          <p:cNvPr id="21685577" name="Shape 11"/>
+          <p:cNvPr id="955062200" name="Shape 11"/>
           <p:cNvSpPr/>
           <p:nvPr/>
         </p:nvSpPr>
@@ -3005,7 +3005,7 @@
       </p:sp>
       <p:sp>
         <p:nvSpPr>
-          <p:cNvPr id="1961770460" name="Text 12"/>
+          <p:cNvPr id="32765695" name="Text 12"/>
           <p:cNvSpPr/>
           <p:nvPr/>
         </p:nvSpPr>
@@ -3045,7 +3045,7 @@
       </p:sp>
       <p:sp>
         <p:nvSpPr>
-          <p:cNvPr id="558676644" name="Text 13"/>
+          <p:cNvPr id="2011606641" name="Text 13"/>
           <p:cNvSpPr/>
           <p:nvPr/>
         </p:nvSpPr>
@@ -3085,7 +3085,7 @@
       </p:sp>
       <p:sp>
         <p:nvSpPr>
-          <p:cNvPr id="1522144919" name="Text 14"/>
+          <p:cNvPr id="157777812" name="Text 14"/>
           <p:cNvSpPr/>
           <p:nvPr/>
         </p:nvSpPr>
@@ -3125,7 +3125,7 @@
       </p:sp>
       <p:sp>
         <p:nvSpPr>
-          <p:cNvPr id="288504737" name="Text 15"/>
+          <p:cNvPr id="916842867" name="Text 15"/>
           <p:cNvSpPr/>
           <p:nvPr/>
         </p:nvSpPr>
@@ -3165,7 +3165,7 @@
       </p:sp>
       <p:sp>
         <p:nvSpPr>
-          <p:cNvPr id="1019139581" name="Text 16"/>
+          <p:cNvPr id="851867140" name="Text 16"/>
           <p:cNvSpPr/>
           <p:nvPr/>
         </p:nvSpPr>
@@ -3205,7 +3205,7 @@
       </p:sp>
       <p:sp>
         <p:nvSpPr>
-          <p:cNvPr id="958487267" name="Text 17"/>
+          <p:cNvPr id="479167995" name="Text 17"/>
           <p:cNvSpPr/>
           <p:nvPr/>
         </p:nvSpPr>
@@ -3285,7 +3285,7 @@
       </p:grpSpPr>
       <p:sp>
         <p:nvSpPr>
-          <p:cNvPr id="761642279" name="Text 0"/>
+          <p:cNvPr id="1485665275" name="Text 0"/>
           <p:cNvSpPr/>
           <p:nvPr/>
         </p:nvSpPr>
@@ -3325,7 +3325,7 @@
       </p:sp>
       <p:sp>
         <p:nvSpPr>
-          <p:cNvPr id="1008446802" name="Text 1"/>
+          <p:cNvPr id="1004996586" name="Text 1"/>
           <p:cNvSpPr/>
           <p:nvPr/>
         </p:nvSpPr>
@@ -3365,7 +3365,7 @@
       </p:sp>
       <p:sp>
         <p:nvSpPr>
-          <p:cNvPr id="1670792983" name="Text 2"/>
+          <p:cNvPr id="1105133791" name="Text 2"/>
           <p:cNvSpPr/>
           <p:nvPr/>
         </p:nvSpPr>
@@ -3405,7 +3405,7 @@
       </p:sp>
       <p:sp>
         <p:nvSpPr>
-          <p:cNvPr id="1063498295" name="Shape 3"/>
+          <p:cNvPr id="396649242" name="Shape 3"/>
           <p:cNvSpPr/>
           <p:nvPr/>
         </p:nvSpPr>
@@ -3432,7 +3432,7 @@
       </p:sp>
       <p:pic>
         <p:nvPicPr>
-          <p:cNvPr id="1051775864" name="Image 0" descr="preencoded.png"/>
+          <p:cNvPr id="405159712" name="Image 0" descr="preencoded.png"/>
           <p:cNvPicPr>
             <a:picLocks noChangeAspect="1"/>
           </p:cNvPicPr>
@@ -3454,7 +3454,7 @@
       </p:pic>
       <p:sp>
         <p:nvSpPr>
-          <p:cNvPr id="647685521" name="Text 4"/>
+          <p:cNvPr id="350468026" name="Text 4"/>
           <p:cNvSpPr/>
           <p:nvPr/>
         </p:nvSpPr>
@@ -3494,7 +3494,7 @@
       </p:sp>
       <p:sp>
         <p:nvSpPr>
-          <p:cNvPr id="1155714424" name="Text 5"/>
+          <p:cNvPr id="2122271165" name="Text 5"/>
           <p:cNvSpPr/>
           <p:nvPr/>
         </p:nvSpPr>
@@ -3534,7 +3534,7 @@
       </p:sp>
       <p:sp>
         <p:nvSpPr>
-          <p:cNvPr id="762512815" name="Shape 6"/>
+          <p:cNvPr id="1495552321" name="Shape 6"/>
           <p:cNvSpPr/>
           <p:nvPr/>
         </p:nvSpPr>
@@ -3561,7 +3561,7 @@
       </p:sp>
       <p:pic>
         <p:nvPicPr>
-          <p:cNvPr id="1155019180" name="Image 1" descr="preencoded.png"/>
+          <p:cNvPr id="1782625000" name="Image 1" descr="preencoded.png"/>
           <p:cNvPicPr>
             <a:picLocks noChangeAspect="1"/>
           </p:cNvPicPr>
@@ -3583,7 +3583,7 @@
       </p:pic>
       <p:sp>
         <p:nvSpPr>
-          <p:cNvPr id="380547937" name="Text 7"/>
+          <p:cNvPr id="340155861" name="Text 7"/>
           <p:cNvSpPr/>
           <p:nvPr/>
         </p:nvSpPr>
@@ -3623,7 +3623,7 @@
       </p:sp>
       <p:sp>
         <p:nvSpPr>
-          <p:cNvPr id="1562544875" name="Text 8"/>
+          <p:cNvPr id="342658341" name="Text 8"/>
           <p:cNvSpPr/>
           <p:nvPr/>
         </p:nvSpPr>
@@ -3663,7 +3663,7 @@
       </p:sp>
       <p:sp>
         <p:nvSpPr>
-          <p:cNvPr id="1255025618" name="Shape 9"/>
+          <p:cNvPr id="1767563596" name="Shape 9"/>
           <p:cNvSpPr/>
           <p:nvPr/>
         </p:nvSpPr>
@@ -3690,7 +3690,7 @@
       </p:sp>
       <p:pic>
         <p:nvPicPr>
-          <p:cNvPr id="74552154" name="Image 2" descr="preencoded.png"/>
+          <p:cNvPr id="1150944891" name="Image 2" descr="preencoded.png"/>
           <p:cNvPicPr>
             <a:picLocks noChangeAspect="1"/>
           </p:cNvPicPr>
@@ -3712,7 +3712,7 @@
       </p:pic>
       <p:sp>
         <p:nvSpPr>
-          <p:cNvPr id="1180555191" name="Text 10"/>
+          <p:cNvPr id="264269189" name="Text 10"/>
           <p:cNvSpPr/>
           <p:nvPr/>
         </p:nvSpPr>
@@ -3752,7 +3752,7 @@
       </p:sp>
       <p:sp>
         <p:nvSpPr>
-          <p:cNvPr id="817105355" name="Text 11"/>
+          <p:cNvPr id="266405480" name="Text 11"/>
           <p:cNvSpPr/>
           <p:nvPr/>
         </p:nvSpPr>
@@ -3792,7 +3792,7 @@
       </p:sp>
       <p:sp>
         <p:nvSpPr>
-          <p:cNvPr id="938861831" name="Text 12"/>
+          <p:cNvPr id="1790699812" name="Text 12"/>
           <p:cNvSpPr/>
           <p:nvPr/>
         </p:nvSpPr>
@@ -3832,7 +3832,7 @@
       </p:sp>
       <p:sp>
         <p:nvSpPr>
-          <p:cNvPr id="1579144407" name="Text 13"/>
+          <p:cNvPr id="1563498725" name="Text 13"/>
           <p:cNvSpPr/>
           <p:nvPr/>
         </p:nvSpPr>
@@ -3872,7 +3872,7 @@
       </p:sp>
       <p:sp>
         <p:nvSpPr>
-          <p:cNvPr id="906512919" name="Text 14"/>
+          <p:cNvPr id="486313898" name="Text 14"/>
           <p:cNvSpPr/>
           <p:nvPr/>
         </p:nvSpPr>
@@ -3912,7 +3912,7 @@
       </p:sp>
       <p:sp>
         <p:nvSpPr>
-          <p:cNvPr id="1046409804" name="Text 15"/>
+          <p:cNvPr id="240828868" name="Text 15"/>
           <p:cNvSpPr/>
           <p:nvPr/>
         </p:nvSpPr>
@@ -3952,7 +3952,7 @@
       </p:sp>
       <p:sp>
         <p:nvSpPr>
-          <p:cNvPr id="1147501955" name="Text 16"/>
+          <p:cNvPr id="1036031069" name="Text 16"/>
           <p:cNvSpPr/>
           <p:nvPr/>
         </p:nvSpPr>
@@ -3992,7 +3992,7 @@
       </p:sp>
       <p:sp>
         <p:nvSpPr>
-          <p:cNvPr id="1793321308" name="Text 17"/>
+          <p:cNvPr id="15193010" name="Text 17"/>
           <p:cNvSpPr/>
           <p:nvPr/>
         </p:nvSpPr>
@@ -4032,7 +4032,7 @@
       </p:sp>
       <p:sp>
         <p:nvSpPr>
-          <p:cNvPr id="563999744" name="Text 18"/>
+          <p:cNvPr id="1152745282" name="Text 18"/>
           <p:cNvSpPr/>
           <p:nvPr/>
         </p:nvSpPr>
@@ -4072,7 +4072,7 @@
       </p:sp>
       <p:sp>
         <p:nvSpPr>
-          <p:cNvPr id="1652950609" name="Text 19"/>
+          <p:cNvPr id="931482278" name="Text 19"/>
           <p:cNvSpPr/>
           <p:nvPr/>
         </p:nvSpPr>
@@ -4152,7 +4152,7 @@
       </p:grpSpPr>
       <p:sp>
         <p:nvSpPr>
-          <p:cNvPr id="451809334" name="Text 0"/>
+          <p:cNvPr id="34512013" name="Text 0"/>
           <p:cNvSpPr/>
           <p:nvPr/>
         </p:nvSpPr>
@@ -4192,7 +4192,7 @@
       </p:sp>
       <p:sp>
         <p:nvSpPr>
-          <p:cNvPr id="525560415" name="Text 1"/>
+          <p:cNvPr id="505401399" name="Text 1"/>
           <p:cNvSpPr/>
           <p:nvPr/>
         </p:nvSpPr>
@@ -4232,7 +4232,7 @@
       </p:sp>
       <p:sp>
         <p:nvSpPr>
-          <p:cNvPr id="187486359" name="Text 2"/>
+          <p:cNvPr id="1798212016" name="Text 2"/>
           <p:cNvSpPr/>
           <p:nvPr/>
         </p:nvSpPr>
@@ -4272,7 +4272,7 @@
       </p:sp>
       <p:sp>
         <p:nvSpPr>
-          <p:cNvPr id="1582115655" name="Shape 3"/>
+          <p:cNvPr id="366136692" name="Shape 3"/>
           <p:cNvSpPr/>
           <p:nvPr/>
         </p:nvSpPr>
@@ -4303,7 +4303,7 @@
       </p:sp>
       <p:pic>
         <p:nvPicPr>
-          <p:cNvPr id="1125351414" name="Image 0" descr="preencoded.png"/>
+          <p:cNvPr id="1032450748" name="Image 0" descr="preencoded.png"/>
           <p:cNvPicPr>
             <a:picLocks noChangeAspect="1"/>
           </p:cNvPicPr>
@@ -4325,7 +4325,7 @@
       </p:pic>
       <p:sp>
         <p:nvSpPr>
-          <p:cNvPr id="575008299" name="Text 4"/>
+          <p:cNvPr id="1439195749" name="Text 4"/>
           <p:cNvSpPr/>
           <p:nvPr/>
         </p:nvSpPr>
@@ -4365,7 +4365,7 @@
       </p:sp>
       <p:sp>
         <p:nvSpPr>
-          <p:cNvPr id="983118261" name="Shape 5"/>
+          <p:cNvPr id="121219382" name="Shape 5"/>
           <p:cNvSpPr/>
           <p:nvPr/>
         </p:nvSpPr>
@@ -4396,7 +4396,7 @@
       </p:sp>
       <p:pic>
         <p:nvPicPr>
-          <p:cNvPr id="145689661" name="Image 1" descr="preencoded.png"/>
+          <p:cNvPr id="240064861" name="Image 1" descr="preencoded.png"/>
           <p:cNvPicPr>
             <a:picLocks noChangeAspect="1"/>
           </p:cNvPicPr>
@@ -4418,7 +4418,7 @@
       </p:pic>
       <p:sp>
         <p:nvSpPr>
-          <p:cNvPr id="1440446775" name="Text 6"/>
+          <p:cNvPr id="871755953" name="Text 6"/>
           <p:cNvSpPr/>
           <p:nvPr/>
         </p:nvSpPr>
@@ -4458,7 +4458,7 @@
       </p:sp>
       <p:sp>
         <p:nvSpPr>
-          <p:cNvPr id="1126287405" name="Shape 7"/>
+          <p:cNvPr id="1802145716" name="Shape 7"/>
           <p:cNvSpPr/>
           <p:nvPr/>
         </p:nvSpPr>
@@ -4489,7 +4489,7 @@
       </p:sp>
       <p:sp>
         <p:nvSpPr>
-          <p:cNvPr id="1773823482" name="Text 8"/>
+          <p:cNvPr id="1320956801" name="Text 8"/>
           <p:cNvSpPr/>
           <p:nvPr/>
         </p:nvSpPr>
@@ -4529,7 +4529,7 @@
       </p:sp>
       <p:sp>
         <p:nvSpPr>
-          <p:cNvPr id="1392260052" name="Shape 9"/>
+          <p:cNvPr id="1925438650" name="Shape 9"/>
           <p:cNvSpPr/>
           <p:nvPr/>
         </p:nvSpPr>
@@ -4560,7 +4560,7 @@
       </p:sp>
       <p:sp>
         <p:nvSpPr>
-          <p:cNvPr id="120169574" name="Text 10"/>
+          <p:cNvPr id="1536820850" name="Text 10"/>
           <p:cNvSpPr/>
           <p:nvPr/>
         </p:nvSpPr>
@@ -4600,7 +4600,7 @@
       </p:sp>
       <p:sp>
         <p:nvSpPr>
-          <p:cNvPr id="2037057175" name="Shape 11"/>
+          <p:cNvPr id="2141170567" name="Shape 11"/>
           <p:cNvSpPr/>
           <p:nvPr/>
         </p:nvSpPr>
@@ -4631,7 +4631,7 @@
       </p:sp>
       <p:sp>
         <p:nvSpPr>
-          <p:cNvPr id="133128986" name="Text 12"/>
+          <p:cNvPr id="227438898" name="Text 12"/>
           <p:cNvSpPr/>
           <p:nvPr/>
         </p:nvSpPr>
@@ -4671,7 +4671,7 @@
       </p:sp>
       <p:sp>
         <p:nvSpPr>
-          <p:cNvPr id="1970107623" name="Shape 13"/>
+          <p:cNvPr id="781840352" name="Shape 13"/>
           <p:cNvSpPr/>
           <p:nvPr/>
         </p:nvSpPr>
@@ -4702,7 +4702,7 @@
       </p:sp>
       <p:sp>
         <p:nvSpPr>
-          <p:cNvPr id="1934579775" name="Text 14"/>
+          <p:cNvPr id="1363296433" name="Text 14"/>
           <p:cNvSpPr/>
           <p:nvPr/>
         </p:nvSpPr>
@@ -4742,7 +4742,7 @@
       </p:sp>
       <p:sp>
         <p:nvSpPr>
-          <p:cNvPr id="1856691433" name="Shape 15"/>
+          <p:cNvPr id="588296875" name="Shape 15"/>
           <p:cNvSpPr/>
           <p:nvPr/>
         </p:nvSpPr>
@@ -4773,7 +4773,7 @@
       </p:sp>
       <p:sp>
         <p:nvSpPr>
-          <p:cNvPr id="821004379" name="Text 16"/>
+          <p:cNvPr id="2104164104" name="Text 16"/>
           <p:cNvSpPr/>
           <p:nvPr/>
         </p:nvSpPr>
@@ -4813,7 +4813,7 @@
       </p:sp>
       <p:sp>
         <p:nvSpPr>
-          <p:cNvPr id="884450026" name="Shape 17"/>
+          <p:cNvPr id="1667866124" name="Shape 17"/>
           <p:cNvSpPr/>
           <p:nvPr/>
         </p:nvSpPr>
@@ -4844,7 +4844,7 @@
       </p:sp>
       <p:sp>
         <p:nvSpPr>
-          <p:cNvPr id="901025813" name="Text 18"/>
+          <p:cNvPr id="90762562" name="Text 18"/>
           <p:cNvSpPr/>
           <p:nvPr/>
         </p:nvSpPr>
@@ -4884,7 +4884,7 @@
       </p:sp>
       <p:sp>
         <p:nvSpPr>
-          <p:cNvPr id="1944411035" name="Shape 19"/>
+          <p:cNvPr id="960633980" name="Shape 19"/>
           <p:cNvSpPr/>
           <p:nvPr/>
         </p:nvSpPr>
@@ -4915,7 +4915,7 @@
       </p:sp>
       <p:sp>
         <p:nvSpPr>
-          <p:cNvPr id="127898186" name="Text 20"/>
+          <p:cNvPr id="254774901" name="Text 20"/>
           <p:cNvSpPr/>
           <p:nvPr/>
         </p:nvSpPr>
@@ -4955,7 +4955,7 @@
       </p:sp>
       <p:sp>
         <p:nvSpPr>
-          <p:cNvPr id="1736032250" name="Shape 21"/>
+          <p:cNvPr id="1797293732" name="Shape 21"/>
           <p:cNvSpPr/>
           <p:nvPr/>
         </p:nvSpPr>
@@ -4986,7 +4986,7 @@
       </p:sp>
       <p:sp>
         <p:nvSpPr>
-          <p:cNvPr id="7656359" name="Text 22"/>
+          <p:cNvPr id="1606769740" name="Text 22"/>
           <p:cNvSpPr/>
           <p:nvPr/>
         </p:nvSpPr>
@@ -5026,7 +5026,7 @@
       </p:sp>
       <p:sp>
         <p:nvSpPr>
-          <p:cNvPr id="348178929" name="Shape 23"/>
+          <p:cNvPr id="268532038" name="Shape 23"/>
           <p:cNvSpPr/>
           <p:nvPr/>
         </p:nvSpPr>
@@ -5057,7 +5057,7 @@
       </p:sp>
       <p:sp>
         <p:nvSpPr>
-          <p:cNvPr id="16491646" name="Text 24"/>
+          <p:cNvPr id="393836931" name="Text 24"/>
           <p:cNvSpPr/>
           <p:nvPr/>
         </p:nvSpPr>
@@ -5097,7 +5097,7 @@
       </p:sp>
       <p:sp>
         <p:nvSpPr>
-          <p:cNvPr id="1550044462" name="Shape 25"/>
+          <p:cNvPr id="389506499" name="Shape 25"/>
           <p:cNvSpPr/>
           <p:nvPr/>
         </p:nvSpPr>
@@ -5128,7 +5128,7 @@
       </p:sp>
       <p:sp>
         <p:nvSpPr>
-          <p:cNvPr id="1528412504" name="Text 26"/>
+          <p:cNvPr id="1262527649" name="Text 26"/>
           <p:cNvSpPr/>
           <p:nvPr/>
         </p:nvSpPr>
@@ -5168,7 +5168,7 @@
       </p:sp>
       <p:sp>
         <p:nvSpPr>
-          <p:cNvPr id="366448451" name="Text 29"/>
+          <p:cNvPr id="453572762" name="Text 29"/>
           <p:cNvSpPr/>
           <p:nvPr/>
         </p:nvSpPr>
@@ -5208,7 +5208,7 @@
       </p:sp>
       <p:sp>
         <p:nvSpPr>
-          <p:cNvPr id="1575993305" name="Text 30"/>
+          <p:cNvPr id="2131715667" name="Text 30"/>
           <p:cNvSpPr/>
           <p:nvPr/>
         </p:nvSpPr>
@@ -5248,7 +5248,7 @@
       </p:sp>
       <p:sp>
         <p:nvSpPr>
-          <p:cNvPr id="917917632" name="Shape 5"/>
+          <p:cNvPr id="1984728432" name="Shape 5"/>
           <p:cNvSpPr/>
           <p:nvPr/>
         </p:nvSpPr>
@@ -5279,7 +5279,7 @@
       </p:sp>
       <p:sp>
         <p:nvSpPr>
-          <p:cNvPr id="1751639743" name="Text 6"/>
+          <p:cNvPr id="823773844" name="Text 6"/>
           <p:cNvSpPr/>
           <p:nvPr/>
         </p:nvSpPr>
@@ -5319,7 +5319,7 @@
       </p:sp>
       <p:pic>
         <p:nvPicPr>
-          <p:cNvPr id="542436024" name="Image 1" descr="preencoded.png"/>
+          <p:cNvPr id="1297388712" name="Image 1" descr="preencoded.png"/>
           <p:cNvPicPr>
             <a:picLocks noChangeAspect="1"/>
           </p:cNvPicPr>
@@ -5341,7 +5341,7 @@
       </p:pic>
       <p:sp>
         <p:nvSpPr>
-          <p:cNvPr id="1993917628" name="Shape 9"/>
+          <p:cNvPr id="135824524" name="Shape 9"/>
           <p:cNvSpPr/>
           <p:nvPr/>
         </p:nvSpPr>
@@ -5372,7 +5372,7 @@
       </p:sp>
       <p:sp>
         <p:nvSpPr>
-          <p:cNvPr id="969225450" name="Text 10"/>
+          <p:cNvPr id="1099206572" name="Text 10"/>
           <p:cNvSpPr/>
           <p:nvPr/>
         </p:nvSpPr>
@@ -5412,7 +5412,7 @@
       </p:sp>
       <p:sp>
         <p:nvSpPr>
-          <p:cNvPr id="268064317" name="Shape 13"/>
+          <p:cNvPr id="1586564801" name="Shape 13"/>
           <p:cNvSpPr/>
           <p:nvPr/>
         </p:nvSpPr>
@@ -5443,7 +5443,7 @@
       </p:sp>
       <p:sp>
         <p:nvSpPr>
-          <p:cNvPr id="723355005" name="Text 14"/>
+          <p:cNvPr id="173392135" name="Text 14"/>
           <p:cNvSpPr/>
           <p:nvPr/>
         </p:nvSpPr>
@@ -5483,7 +5483,7 @@
       </p:sp>
       <p:sp>
         <p:nvSpPr>
-          <p:cNvPr id="170496634" name="Shape 17"/>
+          <p:cNvPr id="234700469" name="Shape 17"/>
           <p:cNvSpPr/>
           <p:nvPr/>
         </p:nvSpPr>
@@ -5514,7 +5514,7 @@
       </p:sp>
       <p:sp>
         <p:nvSpPr>
-          <p:cNvPr id="1410670980" name="Text 18"/>
+          <p:cNvPr id="1120532415" name="Text 18"/>
           <p:cNvSpPr/>
           <p:nvPr/>
         </p:nvSpPr>
@@ -5554,7 +5554,7 @@
       </p:sp>
       <p:sp>
         <p:nvSpPr>
-          <p:cNvPr id="1306079447" name="Shape 21"/>
+          <p:cNvPr id="489285732" name="Shape 21"/>
           <p:cNvSpPr/>
           <p:nvPr/>
         </p:nvSpPr>
@@ -5585,7 +5585,7 @@
       </p:sp>
       <p:sp>
         <p:nvSpPr>
-          <p:cNvPr id="128741185" name="Text 22"/>
+          <p:cNvPr id="401323941" name="Text 22"/>
           <p:cNvSpPr/>
           <p:nvPr/>
         </p:nvSpPr>
@@ -5625,7 +5625,7 @@
       </p:sp>
       <p:sp>
         <p:nvSpPr>
-          <p:cNvPr id="659165674" name="Shape 25"/>
+          <p:cNvPr id="1275304520" name="Shape 25"/>
           <p:cNvSpPr/>
           <p:nvPr/>
         </p:nvSpPr>
@@ -5656,7 +5656,7 @@
       </p:sp>
       <p:sp>
         <p:nvSpPr>
-          <p:cNvPr id="250881464" name="Text 26"/>
+          <p:cNvPr id="2091142731" name="Text 26"/>
           <p:cNvSpPr/>
           <p:nvPr/>
         </p:nvSpPr>
@@ -5736,7 +5736,7 @@
       </p:grpSpPr>
       <p:sp>
         <p:nvSpPr>
-          <p:cNvPr id="1077316014" name="Text 0"/>
+          <p:cNvPr id="1037632831" name="Text 0"/>
           <p:cNvSpPr/>
           <p:nvPr/>
         </p:nvSpPr>
@@ -5776,7 +5776,7 @@
       </p:sp>
       <p:sp>
         <p:nvSpPr>
-          <p:cNvPr id="1788683710" name="Text 1"/>
+          <p:cNvPr id="880496848" name="Text 1"/>
           <p:cNvSpPr/>
           <p:nvPr/>
         </p:nvSpPr>
@@ -5816,7 +5816,7 @@
       </p:sp>
       <p:sp>
         <p:nvSpPr>
-          <p:cNvPr id="746313017" name="Text 2"/>
+          <p:cNvPr id="902972856" name="Text 2"/>
           <p:cNvSpPr/>
           <p:nvPr/>
         </p:nvSpPr>
@@ -5856,7 +5856,7 @@
       </p:sp>
       <p:sp>
         <p:nvSpPr>
-          <p:cNvPr id="1885676236" name="Shape 3"/>
+          <p:cNvPr id="1520374252" name="Shape 3"/>
           <p:cNvSpPr/>
           <p:nvPr/>
         </p:nvSpPr>
@@ -5878,7 +5878,7 @@
       </p:sp>
       <p:sp>
         <p:nvSpPr>
-          <p:cNvPr id="435976422" name="Text 4"/>
+          <p:cNvPr id="926199359" name="Text 4"/>
           <p:cNvSpPr/>
           <p:nvPr/>
         </p:nvSpPr>
@@ -5918,7 +5918,7 @@
       </p:sp>
       <p:sp>
         <p:nvSpPr>
-          <p:cNvPr id="475739827" name="Shape 5"/>
+          <p:cNvPr id="1354108622" name="Shape 5"/>
           <p:cNvSpPr/>
           <p:nvPr/>
         </p:nvSpPr>
@@ -5940,7 +5940,7 @@
       </p:sp>
       <p:sp>
         <p:nvSpPr>
-          <p:cNvPr id="420480484" name="Text 6"/>
+          <p:cNvPr id="1962852423" name="Text 6"/>
           <p:cNvSpPr/>
           <p:nvPr/>
         </p:nvSpPr>
@@ -5980,7 +5980,7 @@
       </p:sp>
       <p:sp>
         <p:nvSpPr>
-          <p:cNvPr id="499855486" name="Shape 7"/>
+          <p:cNvPr id="1039081985" name="Shape 7"/>
           <p:cNvSpPr/>
           <p:nvPr/>
         </p:nvSpPr>
@@ -6007,7 +6007,7 @@
       </p:sp>
       <p:pic>
         <p:nvPicPr>
-          <p:cNvPr id="284081328" name="Image 0" descr="preencoded.png"/>
+          <p:cNvPr id="634784880" name="Image 0" descr="preencoded.png"/>
           <p:cNvPicPr>
             <a:picLocks noChangeAspect="1"/>
           </p:cNvPicPr>
@@ -6029,7 +6029,7 @@
       </p:pic>
       <p:sp>
         <p:nvSpPr>
-          <p:cNvPr id="1000415198" name="Text 8"/>
+          <p:cNvPr id="1888867826" name="Text 8"/>
           <p:cNvSpPr/>
           <p:nvPr/>
         </p:nvSpPr>
@@ -6069,7 +6069,7 @@
       </p:sp>
       <p:sp>
         <p:nvSpPr>
-          <p:cNvPr id="290887708" name="Shape 9"/>
+          <p:cNvPr id="1659827474" name="Shape 9"/>
           <p:cNvSpPr/>
           <p:nvPr/>
         </p:nvSpPr>
@@ -6091,7 +6091,7 @@
       </p:sp>
       <p:pic>
         <p:nvPicPr>
-          <p:cNvPr id="1028156575" name="Image 1" descr="preencoded.png"/>
+          <p:cNvPr id="1619096713" name="Image 1" descr="preencoded.png"/>
           <p:cNvPicPr>
             <a:picLocks noChangeAspect="1"/>
           </p:cNvPicPr>
@@ -6113,7 +6113,7 @@
       </p:pic>
       <p:sp>
         <p:nvSpPr>
-          <p:cNvPr id="1709812926" name="Text 10"/>
+          <p:cNvPr id="318202727" name="Text 10"/>
           <p:cNvSpPr/>
           <p:nvPr/>
         </p:nvSpPr>
@@ -6153,7 +6153,7 @@
       </p:sp>
       <p:pic>
         <p:nvPicPr>
-          <p:cNvPr id="1119381563" name="Image 2" descr="preencoded.png"/>
+          <p:cNvPr id="1138792497" name="Image 2" descr="preencoded.png"/>
           <p:cNvPicPr>
             <a:picLocks noChangeAspect="1"/>
           </p:cNvPicPr>
@@ -6175,7 +6175,7 @@
       </p:pic>
       <p:sp>
         <p:nvSpPr>
-          <p:cNvPr id="1607096481" name="Shape 11"/>
+          <p:cNvPr id="378384009" name="Shape 11"/>
           <p:cNvSpPr/>
           <p:nvPr/>
         </p:nvSpPr>
@@ -6202,7 +6202,7 @@
       </p:sp>
       <p:pic>
         <p:nvPicPr>
-          <p:cNvPr id="430001663" name="Image 3" descr="preencoded.png"/>
+          <p:cNvPr id="1980507969" name="Image 3" descr="preencoded.png"/>
           <p:cNvPicPr>
             <a:picLocks noChangeAspect="1"/>
           </p:cNvPicPr>
@@ -6224,7 +6224,7 @@
       </p:pic>
       <p:sp>
         <p:nvSpPr>
-          <p:cNvPr id="435036607" name="Text 12"/>
+          <p:cNvPr id="2032673838" name="Text 12"/>
           <p:cNvSpPr/>
           <p:nvPr/>
         </p:nvSpPr>
@@ -6264,7 +6264,7 @@
       </p:sp>
       <p:sp>
         <p:nvSpPr>
-          <p:cNvPr id="1099332990" name="Shape 13"/>
+          <p:cNvPr id="842830909" name="Shape 13"/>
           <p:cNvSpPr/>
           <p:nvPr/>
         </p:nvSpPr>
@@ -6286,7 +6286,7 @@
       </p:sp>
       <p:pic>
         <p:nvPicPr>
-          <p:cNvPr id="946782225" name="Image 4" descr="preencoded.png"/>
+          <p:cNvPr id="815494405" name="Image 4" descr="preencoded.png"/>
           <p:cNvPicPr>
             <a:picLocks noChangeAspect="1"/>
           </p:cNvPicPr>
@@ -6308,7 +6308,7 @@
       </p:pic>
       <p:sp>
         <p:nvSpPr>
-          <p:cNvPr id="694053774" name="Text 14"/>
+          <p:cNvPr id="2019796464" name="Text 14"/>
           <p:cNvSpPr/>
           <p:nvPr/>
         </p:nvSpPr>
@@ -6348,7 +6348,7 @@
       </p:sp>
       <p:pic>
         <p:nvPicPr>
-          <p:cNvPr id="1512593934" name="Image 5" descr="preencoded.png"/>
+          <p:cNvPr id="408917544" name="Image 5" descr="preencoded.png"/>
           <p:cNvPicPr>
             <a:picLocks noChangeAspect="1"/>
           </p:cNvPicPr>
@@ -6370,7 +6370,7 @@
       </p:pic>
       <p:sp>
         <p:nvSpPr>
-          <p:cNvPr id="843538010" name="Shape 15"/>
+          <p:cNvPr id="1829511688" name="Shape 15"/>
           <p:cNvSpPr/>
           <p:nvPr/>
         </p:nvSpPr>
@@ -6397,7 +6397,7 @@
       </p:sp>
       <p:pic>
         <p:nvPicPr>
-          <p:cNvPr id="35492171" name="Image 6" descr="preencoded.png"/>
+          <p:cNvPr id="82216407" name="Image 6" descr="preencoded.png"/>
           <p:cNvPicPr>
             <a:picLocks noChangeAspect="1"/>
           </p:cNvPicPr>
@@ -6419,7 +6419,7 @@
       </p:pic>
       <p:sp>
         <p:nvSpPr>
-          <p:cNvPr id="1561234800" name="Text 16"/>
+          <p:cNvPr id="515678256" name="Text 16"/>
           <p:cNvSpPr/>
           <p:nvPr/>
         </p:nvSpPr>
@@ -6459,7 +6459,7 @@
       </p:sp>
       <p:sp>
         <p:nvSpPr>
-          <p:cNvPr id="814705773" name="Shape 17"/>
+          <p:cNvPr id="1649232144" name="Shape 17"/>
           <p:cNvSpPr/>
           <p:nvPr/>
         </p:nvSpPr>
@@ -6481,7 +6481,7 @@
       </p:sp>
       <p:pic>
         <p:nvPicPr>
-          <p:cNvPr id="1200398223" name="Image 7" descr="preencoded.png"/>
+          <p:cNvPr id="1384622523" name="Image 7" descr="preencoded.png"/>
           <p:cNvPicPr>
             <a:picLocks noChangeAspect="1"/>
           </p:cNvPicPr>
@@ -6503,7 +6503,7 @@
       </p:pic>
       <p:sp>
         <p:nvSpPr>
-          <p:cNvPr id="409112312" name="Text 18"/>
+          <p:cNvPr id="925485739" name="Text 18"/>
           <p:cNvSpPr/>
           <p:nvPr/>
         </p:nvSpPr>
@@ -6543,7 +6543,7 @@
       </p:sp>
       <p:pic>
         <p:nvPicPr>
-          <p:cNvPr id="2051104520" name="Image 8" descr="preencoded.png"/>
+          <p:cNvPr id="2015815686" name="Image 8" descr="preencoded.png"/>
           <p:cNvPicPr>
             <a:picLocks noChangeAspect="1"/>
           </p:cNvPicPr>
@@ -6565,7 +6565,7 @@
       </p:pic>
       <p:sp>
         <p:nvSpPr>
-          <p:cNvPr id="1452731320" name="Shape 19"/>
+          <p:cNvPr id="1240531455" name="Shape 19"/>
           <p:cNvSpPr/>
           <p:nvPr/>
         </p:nvSpPr>
@@ -6592,7 +6592,7 @@
       </p:sp>
       <p:pic>
         <p:nvPicPr>
-          <p:cNvPr id="1281372" name="Image 9" descr="preencoded.png"/>
+          <p:cNvPr id="139301119" name="Image 9" descr="preencoded.png"/>
           <p:cNvPicPr>
             <a:picLocks noChangeAspect="1"/>
           </p:cNvPicPr>
@@ -6614,7 +6614,7 @@
       </p:pic>
       <p:sp>
         <p:nvSpPr>
-          <p:cNvPr id="1276305269" name="Text 20"/>
+          <p:cNvPr id="1221285202" name="Text 20"/>
           <p:cNvSpPr/>
           <p:nvPr/>
         </p:nvSpPr>
@@ -6654,7 +6654,7 @@
       </p:sp>
       <p:sp>
         <p:nvSpPr>
-          <p:cNvPr id="1896070082" name="Shape 21"/>
+          <p:cNvPr id="1526361843" name="Shape 21"/>
           <p:cNvSpPr/>
           <p:nvPr/>
         </p:nvSpPr>
@@ -6676,7 +6676,7 @@
       </p:sp>
       <p:pic>
         <p:nvPicPr>
-          <p:cNvPr id="446022756" name="Image 10" descr="preencoded.png"/>
+          <p:cNvPr id="1039234983" name="Image 10" descr="preencoded.png"/>
           <p:cNvPicPr>
             <a:picLocks noChangeAspect="1"/>
           </p:cNvPicPr>
@@ -6698,7 +6698,7 @@
       </p:pic>
       <p:sp>
         <p:nvSpPr>
-          <p:cNvPr id="586947552" name="Text 22"/>
+          <p:cNvPr id="1677358208" name="Text 22"/>
           <p:cNvSpPr/>
           <p:nvPr/>
         </p:nvSpPr>
@@ -6738,7 +6738,7 @@
       </p:sp>
       <p:pic>
         <p:nvPicPr>
-          <p:cNvPr id="1162959739" name="Image 11" descr="preencoded.png"/>
+          <p:cNvPr id="1009680582" name="Image 11" descr="preencoded.png"/>
           <p:cNvPicPr>
             <a:picLocks noChangeAspect="1"/>
           </p:cNvPicPr>
@@ -6760,7 +6760,7 @@
       </p:pic>
       <p:sp>
         <p:nvSpPr>
-          <p:cNvPr id="206288443" name="Text 23"/>
+          <p:cNvPr id="1512254813" name="Text 23"/>
           <p:cNvSpPr/>
           <p:nvPr/>
         </p:nvSpPr>
@@ -6800,7 +6800,7 @@
       </p:sp>
       <p:sp>
         <p:nvSpPr>
-          <p:cNvPr id="1052205078" name="Text 24"/>
+          <p:cNvPr id="909978150" name="Text 24"/>
           <p:cNvSpPr/>
           <p:nvPr/>
         </p:nvSpPr>
@@ -6880,7 +6880,7 @@
       </p:grpSpPr>
       <p:sp>
         <p:nvSpPr>
-          <p:cNvPr id="1823088960" name="Text 0"/>
+          <p:cNvPr id="744569992" name="Text 0"/>
           <p:cNvSpPr/>
           <p:nvPr/>
         </p:nvSpPr>
@@ -6924,7 +6924,7 @@
       </p:sp>
       <p:sp>
         <p:nvSpPr>
-          <p:cNvPr id="766617331" name="Text 1"/>
+          <p:cNvPr id="82346974" name="Text 1"/>
           <p:cNvSpPr/>
           <p:nvPr/>
         </p:nvSpPr>
@@ -6968,7 +6968,7 @@
       </p:sp>
       <p:sp>
         <p:nvSpPr>
-          <p:cNvPr id="1672731734" name="Text 2"/>
+          <p:cNvPr id="1944362653" name="Text 2"/>
           <p:cNvSpPr/>
           <p:nvPr/>
         </p:nvSpPr>
@@ -7012,7 +7012,7 @@
       </p:sp>
       <p:sp>
         <p:nvSpPr>
-          <p:cNvPr id="871353601" name="Shape 3"/>
+          <p:cNvPr id="1780970645" name="Shape 3"/>
           <p:cNvSpPr/>
           <p:nvPr/>
         </p:nvSpPr>
@@ -7056,7 +7056,7 @@
       </p:sp>
       <p:pic>
         <p:nvPicPr>
-          <p:cNvPr id="151758114" name="Image 1" descr="preencoded.png"/>
+          <p:cNvPr id="1948809083" name="Image 1" descr="preencoded.png"/>
           <p:cNvPicPr>
             <a:picLocks noChangeAspect="1"/>
           </p:cNvPicPr>
@@ -7078,7 +7078,7 @@
       </p:pic>
       <p:sp>
         <p:nvSpPr>
-          <p:cNvPr id="2035305473" name="Text 4"/>
+          <p:cNvPr id="1703730786" name="Text 4"/>
           <p:cNvSpPr/>
           <p:nvPr/>
         </p:nvSpPr>
@@ -7122,7 +7122,7 @@
       </p:sp>
       <p:sp>
         <p:nvSpPr>
-          <p:cNvPr id="1993238010" name="Text 5"/>
+          <p:cNvPr id="1290036679" name="Text 5"/>
           <p:cNvSpPr/>
           <p:nvPr/>
         </p:nvSpPr>
@@ -7166,7 +7166,7 @@
       </p:sp>
       <p:pic>
         <p:nvPicPr>
-          <p:cNvPr id="729400950" name="Image 2" descr="preencoded.png"/>
+          <p:cNvPr id="923343917" name="Image 2" descr="preencoded.png"/>
           <p:cNvPicPr>
             <a:picLocks noChangeAspect="1"/>
           </p:cNvPicPr>
@@ -7188,7 +7188,7 @@
       </p:pic>
       <p:sp>
         <p:nvSpPr>
-          <p:cNvPr id="1407543410" name="Shape 6"/>
+          <p:cNvPr id="634793745" name="Shape 6"/>
           <p:cNvSpPr/>
           <p:nvPr/>
         </p:nvSpPr>
@@ -7232,7 +7232,7 @@
       </p:sp>
       <p:pic>
         <p:nvPicPr>
-          <p:cNvPr id="473200811" name="Image 3" descr="preencoded.png"/>
+          <p:cNvPr id="1886269863" name="Image 3" descr="preencoded.png"/>
           <p:cNvPicPr>
             <a:picLocks noChangeAspect="1"/>
           </p:cNvPicPr>
@@ -7254,7 +7254,7 @@
       </p:pic>
       <p:sp>
         <p:nvSpPr>
-          <p:cNvPr id="645834270" name="Text 7"/>
+          <p:cNvPr id="1219557726" name="Text 7"/>
           <p:cNvSpPr/>
           <p:nvPr/>
         </p:nvSpPr>
@@ -7298,7 +7298,7 @@
       </p:sp>
       <p:sp>
         <p:nvSpPr>
-          <p:cNvPr id="115591806" name="Text 8"/>
+          <p:cNvPr id="679911566" name="Text 8"/>
           <p:cNvSpPr/>
           <p:nvPr/>
         </p:nvSpPr>
@@ -7342,7 +7342,7 @@
       </p:sp>
       <p:pic>
         <p:nvPicPr>
-          <p:cNvPr id="1471645456" name="Image 4" descr="preencoded.png"/>
+          <p:cNvPr id="1298410531" name="Image 4" descr="preencoded.png"/>
           <p:cNvPicPr>
             <a:picLocks noChangeAspect="1"/>
           </p:cNvPicPr>
@@ -7364,7 +7364,7 @@
       </p:pic>
       <p:sp>
         <p:nvSpPr>
-          <p:cNvPr id="627245108" name="Shape 9"/>
+          <p:cNvPr id="454895396" name="Shape 9"/>
           <p:cNvSpPr/>
           <p:nvPr/>
         </p:nvSpPr>
@@ -7408,7 +7408,7 @@
       </p:sp>
       <p:pic>
         <p:nvPicPr>
-          <p:cNvPr id="1039784446" name="Image 5" descr="preencoded.png"/>
+          <p:cNvPr id="1490093247" name="Image 5" descr="preencoded.png"/>
           <p:cNvPicPr>
             <a:picLocks noChangeAspect="1"/>
           </p:cNvPicPr>
@@ -7430,7 +7430,7 @@
       </p:pic>
       <p:sp>
         <p:nvSpPr>
-          <p:cNvPr id="951625864" name="Text 10"/>
+          <p:cNvPr id="1238281021" name="Text 10"/>
           <p:cNvSpPr/>
           <p:nvPr/>
         </p:nvSpPr>
@@ -7474,7 +7474,7 @@
       </p:sp>
       <p:sp>
         <p:nvSpPr>
-          <p:cNvPr id="137116939" name="Text 11"/>
+          <p:cNvPr id="1178267404" name="Text 11"/>
           <p:cNvSpPr/>
           <p:nvPr/>
         </p:nvSpPr>
@@ -7518,7 +7518,7 @@
       </p:sp>
       <p:sp>
         <p:nvSpPr>
-          <p:cNvPr id="613189554" name="Text 12"/>
+          <p:cNvPr id="668182682" name="Text 12"/>
           <p:cNvSpPr/>
           <p:nvPr/>
         </p:nvSpPr>
@@ -7562,7 +7562,7 @@
       </p:sp>
       <p:sp>
         <p:nvSpPr>
-          <p:cNvPr id="1054290349" name="Text 13"/>
+          <p:cNvPr id="1307833388" name="Text 13"/>
           <p:cNvSpPr/>
           <p:nvPr/>
         </p:nvSpPr>
@@ -7646,7 +7646,7 @@
       </p:grpSpPr>
       <p:sp>
         <p:nvSpPr>
-          <p:cNvPr id="2110780485" name="Text 0"/>
+          <p:cNvPr id="500492495" name="Text 0"/>
           <p:cNvSpPr/>
           <p:nvPr/>
         </p:nvSpPr>
@@ -7686,7 +7686,7 @@
       </p:sp>
       <p:sp>
         <p:nvSpPr>
-          <p:cNvPr id="751470470" name="Text 1"/>
+          <p:cNvPr id="1865309033" name="Text 1"/>
           <p:cNvSpPr/>
           <p:nvPr/>
         </p:nvSpPr>
@@ -7726,7 +7726,7 @@
       </p:sp>
       <p:sp>
         <p:nvSpPr>
-          <p:cNvPr id="1378910745" name="Text 2"/>
+          <p:cNvPr id="439075499" name="Text 2"/>
           <p:cNvSpPr/>
           <p:nvPr/>
         </p:nvSpPr>
@@ -7766,7 +7766,7 @@
       </p:sp>
       <p:sp>
         <p:nvSpPr>
-          <p:cNvPr id="1997701009" name="Shape 3"/>
+          <p:cNvPr id="607740122" name="Shape 3"/>
           <p:cNvSpPr/>
           <p:nvPr/>
         </p:nvSpPr>
@@ -7788,7 +7788,7 @@
       </p:sp>
       <p:pic>
         <p:nvPicPr>
-          <p:cNvPr id="1456854915" name="Image 0" descr="preencoded.png"/>
+          <p:cNvPr id="231137669" name="Image 0" descr="preencoded.png"/>
           <p:cNvPicPr>
             <a:picLocks noChangeAspect="1"/>
           </p:cNvPicPr>
@@ -7810,7 +7810,7 @@
       </p:pic>
       <p:sp>
         <p:nvSpPr>
-          <p:cNvPr id="8536831" name="Text 4"/>
+          <p:cNvPr id="40743126" name="Text 4"/>
           <p:cNvSpPr/>
           <p:nvPr/>
         </p:nvSpPr>
@@ -7850,7 +7850,7 @@
       </p:sp>
       <p:sp>
         <p:nvSpPr>
-          <p:cNvPr id="326061165" name="Text 5"/>
+          <p:cNvPr id="1879188763" name="Text 5"/>
           <p:cNvSpPr/>
           <p:nvPr/>
         </p:nvSpPr>
@@ -7890,7 +7890,7 @@
       </p:sp>
       <p:sp>
         <p:nvSpPr>
-          <p:cNvPr id="154690357" name="Shape 6"/>
+          <p:cNvPr id="396732334" name="Shape 6"/>
           <p:cNvSpPr/>
           <p:nvPr/>
         </p:nvSpPr>
@@ -7912,7 +7912,7 @@
       </p:sp>
       <p:pic>
         <p:nvPicPr>
-          <p:cNvPr id="258017400" name="Image 1" descr="preencoded.png"/>
+          <p:cNvPr id="1867991509" name="Image 1" descr="preencoded.png"/>
           <p:cNvPicPr>
             <a:picLocks noChangeAspect="1"/>
           </p:cNvPicPr>
@@ -7934,7 +7934,7 @@
       </p:pic>
       <p:sp>
         <p:nvSpPr>
-          <p:cNvPr id="2061352837" name="Text 7"/>
+          <p:cNvPr id="1976331773" name="Text 7"/>
           <p:cNvSpPr/>
           <p:nvPr/>
         </p:nvSpPr>
@@ -7974,7 +7974,7 @@
       </p:sp>
       <p:sp>
         <p:nvSpPr>
-          <p:cNvPr id="297888813" name="Text 8"/>
+          <p:cNvPr id="738912447" name="Text 8"/>
           <p:cNvSpPr/>
           <p:nvPr/>
         </p:nvSpPr>
@@ -8014,7 +8014,7 @@
       </p:sp>
       <p:sp>
         <p:nvSpPr>
-          <p:cNvPr id="1083414102" name="Shape 9"/>
+          <p:cNvPr id="570115376" name="Shape 9"/>
           <p:cNvSpPr/>
           <p:nvPr/>
         </p:nvSpPr>
@@ -8036,7 +8036,7 @@
       </p:sp>
       <p:pic>
         <p:nvPicPr>
-          <p:cNvPr id="1990943770" name="Image 2" descr="preencoded.png"/>
+          <p:cNvPr id="128936376" name="Image 2" descr="preencoded.png"/>
           <p:cNvPicPr>
             <a:picLocks noChangeAspect="1"/>
           </p:cNvPicPr>
@@ -8058,7 +8058,7 @@
       </p:pic>
       <p:sp>
         <p:nvSpPr>
-          <p:cNvPr id="1391096339" name="Text 10"/>
+          <p:cNvPr id="330951960" name="Text 10"/>
           <p:cNvSpPr/>
           <p:nvPr/>
         </p:nvSpPr>
@@ -8098,7 +8098,7 @@
       </p:sp>
       <p:sp>
         <p:nvSpPr>
-          <p:cNvPr id="2049295202" name="Text 11"/>
+          <p:cNvPr id="1100827417" name="Text 11"/>
           <p:cNvSpPr/>
           <p:nvPr/>
         </p:nvSpPr>
@@ -8138,7 +8138,7 @@
       </p:sp>
       <p:sp>
         <p:nvSpPr>
-          <p:cNvPr id="1295776577" name="Shape 12"/>
+          <p:cNvPr id="1781470930" name="Shape 12"/>
           <p:cNvSpPr/>
           <p:nvPr/>
         </p:nvSpPr>
@@ -8160,7 +8160,7 @@
       </p:sp>
       <p:pic>
         <p:nvPicPr>
-          <p:cNvPr id="1680856402" name="Image 3" descr="preencoded.png"/>
+          <p:cNvPr id="1504945980" name="Image 3" descr="preencoded.png"/>
           <p:cNvPicPr>
             <a:picLocks noChangeAspect="1"/>
           </p:cNvPicPr>
@@ -8182,7 +8182,7 @@
       </p:pic>
       <p:sp>
         <p:nvSpPr>
-          <p:cNvPr id="1778755706" name="Text 13"/>
+          <p:cNvPr id="886168102" name="Text 13"/>
           <p:cNvSpPr/>
           <p:nvPr/>
         </p:nvSpPr>
@@ -8222,7 +8222,7 @@
       </p:sp>
       <p:sp>
         <p:nvSpPr>
-          <p:cNvPr id="543644678" name="Text 14"/>
+          <p:cNvPr id="1861203479" name="Text 14"/>
           <p:cNvSpPr/>
           <p:nvPr/>
         </p:nvSpPr>
@@ -8262,7 +8262,7 @@
       </p:sp>
       <p:sp>
         <p:nvSpPr>
-          <p:cNvPr id="1752396778" name="Shape 15"/>
+          <p:cNvPr id="1644948725" name="Shape 15"/>
           <p:cNvSpPr/>
           <p:nvPr/>
         </p:nvSpPr>
@@ -8284,7 +8284,7 @@
       </p:sp>
       <p:pic>
         <p:nvPicPr>
-          <p:cNvPr id="2034316355" name="Image 4" descr="preencoded.png"/>
+          <p:cNvPr id="1914341987" name="Image 4" descr="preencoded.png"/>
           <p:cNvPicPr>
             <a:picLocks noChangeAspect="1"/>
           </p:cNvPicPr>
@@ -8306,7 +8306,7 @@
       </p:pic>
       <p:sp>
         <p:nvSpPr>
-          <p:cNvPr id="1358436447" name="Text 16"/>
+          <p:cNvPr id="926044743" name="Text 16"/>
           <p:cNvSpPr/>
           <p:nvPr/>
         </p:nvSpPr>
@@ -8346,7 +8346,7 @@
       </p:sp>
       <p:sp>
         <p:nvSpPr>
-          <p:cNvPr id="1007859286" name="Text 17"/>
+          <p:cNvPr id="1857443468" name="Text 17"/>
           <p:cNvSpPr/>
           <p:nvPr/>
         </p:nvSpPr>
@@ -8386,7 +8386,7 @@
       </p:sp>
       <p:sp>
         <p:nvSpPr>
-          <p:cNvPr id="164431758" name="Text 18"/>
+          <p:cNvPr id="1949511767" name="Text 18"/>
           <p:cNvSpPr/>
           <p:nvPr/>
         </p:nvSpPr>
@@ -8426,7 +8426,7 @@
       </p:sp>
       <p:sp>
         <p:nvSpPr>
-          <p:cNvPr id="1015828642" name="Text 19"/>
+          <p:cNvPr id="769468809" name="Text 19"/>
           <p:cNvSpPr/>
           <p:nvPr/>
         </p:nvSpPr>
@@ -8506,7 +8506,7 @@
       </p:grpSpPr>
       <p:pic>
         <p:nvPicPr>
-          <p:cNvPr id="358838747" name="Image 0" descr="preencoded.png"/>
+          <p:cNvPr id="2069785699" name="Image 0" descr="preencoded.png"/>
           <p:cNvPicPr>
             <a:picLocks noChangeAspect="1"/>
           </p:cNvPicPr>
@@ -8528,7 +8528,7 @@
       </p:pic>
       <p:pic>
         <p:nvPicPr>
-          <p:cNvPr id="1352305766" name="Image 1" descr="preencoded.png"/>
+          <p:cNvPr id="940730871" name="Image 1" descr="preencoded.png"/>
           <p:cNvPicPr>
             <a:picLocks noChangeAspect="1"/>
           </p:cNvPicPr>
@@ -8550,7 +8550,7 @@
       </p:pic>
       <p:sp>
         <p:nvSpPr>
-          <p:cNvPr id="221578572" name="Text 0"/>
+          <p:cNvPr id="1095567064" name="Text 0"/>
           <p:cNvSpPr/>
           <p:nvPr/>
         </p:nvSpPr>
@@ -8590,7 +8590,7 @@
       </p:sp>
       <p:sp>
         <p:nvSpPr>
-          <p:cNvPr id="1658466978" name="Text 1"/>
+          <p:cNvPr id="2071855641" name="Text 1"/>
           <p:cNvSpPr/>
           <p:nvPr/>
         </p:nvSpPr>
@@ -8630,7 +8630,7 @@
       </p:sp>
       <p:sp>
         <p:nvSpPr>
-          <p:cNvPr id="897753363" name="Text 2"/>
+          <p:cNvPr id="1913999305" name="Text 2"/>
           <p:cNvSpPr/>
           <p:nvPr/>
         </p:nvSpPr>
@@ -8670,7 +8670,7 @@
       </p:sp>
       <p:sp>
         <p:nvSpPr>
-          <p:cNvPr id="88008368" name="Text 3"/>
+          <p:cNvPr id="1354292439" name="Text 3"/>
           <p:cNvSpPr/>
           <p:nvPr/>
         </p:nvSpPr>
@@ -8710,7 +8710,7 @@
       </p:sp>
       <p:sp>
         <p:nvSpPr>
-          <p:cNvPr id="881978597" name="Text 4"/>
+          <p:cNvPr id="614429908" name="Text 4"/>
           <p:cNvSpPr/>
           <p:nvPr/>
         </p:nvSpPr>
@@ -8790,7 +8790,7 @@
       </p:grpSpPr>
       <p:sp>
         <p:nvSpPr>
-          <p:cNvPr id="2143641206" name="Text 0"/>
+          <p:cNvPr id="923851165" name="Text 0"/>
           <p:cNvSpPr/>
           <p:nvPr/>
         </p:nvSpPr>
@@ -8830,7 +8830,7 @@
       </p:sp>
       <p:sp>
         <p:nvSpPr>
-          <p:cNvPr id="1883464758" name="Text 1"/>
+          <p:cNvPr id="1608817092" name="Text 1"/>
           <p:cNvSpPr/>
           <p:nvPr/>
         </p:nvSpPr>
@@ -8870,7 +8870,7 @@
       </p:sp>
       <p:sp>
         <p:nvSpPr>
-          <p:cNvPr id="970645939" name="Text 2"/>
+          <p:cNvPr id="35939064" name="Text 2"/>
           <p:cNvSpPr/>
           <p:nvPr/>
         </p:nvSpPr>
@@ -8910,7 +8910,7 @@
       </p:sp>
       <p:sp>
         <p:nvSpPr>
-          <p:cNvPr id="1382823988" name="Shape 3"/>
+          <p:cNvPr id="168964507" name="Shape 3"/>
           <p:cNvSpPr/>
           <p:nvPr/>
         </p:nvSpPr>
@@ -8944,7 +8944,7 @@
       </p:sp>
       <p:pic>
         <p:nvPicPr>
-          <p:cNvPr id="33888484" name="Image 0" descr="preencoded.png"/>
+          <p:cNvPr id="1689665535" name="Image 0" descr="preencoded.png"/>
           <p:cNvPicPr>
             <a:picLocks noChangeAspect="1"/>
           </p:cNvPicPr>
@@ -8966,7 +8966,7 @@
       </p:pic>
       <p:sp>
         <p:nvSpPr>
-          <p:cNvPr id="1229046372" name="Text 4"/>
+          <p:cNvPr id="1623947990" name="Text 4"/>
           <p:cNvSpPr/>
           <p:nvPr/>
         </p:nvSpPr>
@@ -9006,7 +9006,7 @@
       </p:sp>
       <p:sp>
         <p:nvSpPr>
-          <p:cNvPr id="1371108939" name="Text 5"/>
+          <p:cNvPr id="1762682149" name="Text 5"/>
           <p:cNvSpPr/>
           <p:nvPr/>
         </p:nvSpPr>
@@ -9046,7 +9046,7 @@
       </p:sp>
       <p:sp>
         <p:nvSpPr>
-          <p:cNvPr id="367813920" name="Shape 8"/>
+          <p:cNvPr id="506553819" name="Shape 8"/>
           <p:cNvSpPr/>
           <p:nvPr/>
         </p:nvSpPr>
@@ -9080,7 +9080,7 @@
       </p:sp>
       <p:pic>
         <p:nvPicPr>
-          <p:cNvPr id="588048755" name="Image 1" descr="preencoded.png"/>
+          <p:cNvPr id="1610155632" name="Image 1" descr="preencoded.png"/>
           <p:cNvPicPr>
             <a:picLocks noChangeAspect="1"/>
           </p:cNvPicPr>
@@ -9102,7 +9102,7 @@
       </p:pic>
       <p:sp>
         <p:nvSpPr>
-          <p:cNvPr id="1762806115" name="Text 9"/>
+          <p:cNvPr id="1803318830" name="Text 9"/>
           <p:cNvSpPr/>
           <p:nvPr/>
         </p:nvSpPr>
@@ -9142,7 +9142,7 @@
       </p:sp>
       <p:sp>
         <p:nvSpPr>
-          <p:cNvPr id="2058479935" name="Text 10"/>
+          <p:cNvPr id="965506404" name="Text 10"/>
           <p:cNvSpPr/>
           <p:nvPr/>
         </p:nvSpPr>
@@ -9182,7 +9182,7 @@
       </p:sp>
       <p:sp>
         <p:nvSpPr>
-          <p:cNvPr id="648028599" name="Shape 13"/>
+          <p:cNvPr id="1536894853" name="Shape 13"/>
           <p:cNvSpPr/>
           <p:nvPr/>
         </p:nvSpPr>
@@ -9216,7 +9216,7 @@
       </p:sp>
       <p:pic>
         <p:nvPicPr>
-          <p:cNvPr id="493800301" name="Image 2" descr="preencoded.png"/>
+          <p:cNvPr id="241890982" name="Image 2" descr="preencoded.png"/>
           <p:cNvPicPr>
             <a:picLocks noChangeAspect="1"/>
           </p:cNvPicPr>
@@ -9238,7 +9238,7 @@
       </p:pic>
       <p:sp>
         <p:nvSpPr>
-          <p:cNvPr id="1151137944" name="Text 14"/>
+          <p:cNvPr id="2062691465" name="Text 14"/>
           <p:cNvSpPr/>
           <p:nvPr/>
         </p:nvSpPr>
@@ -9278,7 +9278,7 @@
       </p:sp>
       <p:sp>
         <p:nvSpPr>
-          <p:cNvPr id="1362803406" name="Text 15"/>
+          <p:cNvPr id="1713628283" name="Text 15"/>
           <p:cNvSpPr/>
           <p:nvPr/>
         </p:nvSpPr>
@@ -9318,7 +9318,7 @@
       </p:sp>
       <p:sp>
         <p:nvSpPr>
-          <p:cNvPr id="1500944475" name="Shape 18"/>
+          <p:cNvPr id="1890844062" name="Shape 18"/>
           <p:cNvSpPr/>
           <p:nvPr/>
         </p:nvSpPr>
@@ -9352,7 +9352,7 @@
       </p:sp>
       <p:pic>
         <p:nvPicPr>
-          <p:cNvPr id="1510047995" name="Image 3" descr="preencoded.png"/>
+          <p:cNvPr id="1721153707" name="Image 3" descr="preencoded.png"/>
           <p:cNvPicPr>
             <a:picLocks noChangeAspect="1"/>
           </p:cNvPicPr>
@@ -9374,7 +9374,7 @@
       </p:pic>
       <p:sp>
         <p:nvSpPr>
-          <p:cNvPr id="1756261989" name="Text 19"/>
+          <p:cNvPr id="2116628773" name="Text 19"/>
           <p:cNvSpPr/>
           <p:nvPr/>
         </p:nvSpPr>
@@ -9414,7 +9414,7 @@
       </p:sp>
       <p:sp>
         <p:nvSpPr>
-          <p:cNvPr id="1870776041" name="Text 20"/>
+          <p:cNvPr id="321772062" name="Text 20"/>
           <p:cNvSpPr/>
           <p:nvPr/>
         </p:nvSpPr>
@@ -9454,7 +9454,7 @@
       </p:sp>
       <p:sp>
         <p:nvSpPr>
-          <p:cNvPr id="392604916" name="Text 23"/>
+          <p:cNvPr id="1108594606" name="Text 23"/>
           <p:cNvSpPr/>
           <p:nvPr/>
         </p:nvSpPr>
@@ -9494,7 +9494,7 @@
       </p:sp>
       <p:sp>
         <p:nvSpPr>
-          <p:cNvPr id="896848161" name="Text 24"/>
+          <p:cNvPr id="60516176" name="Text 24"/>
           <p:cNvSpPr/>
           <p:nvPr/>
         </p:nvSpPr>
@@ -9574,7 +9574,7 @@
       </p:grpSpPr>
       <p:sp>
         <p:nvSpPr>
-          <p:cNvPr id="1005698533" name="Text 0"/>
+          <p:cNvPr id="1544879493" name="Text 0"/>
           <p:cNvSpPr/>
           <p:nvPr/>
         </p:nvSpPr>
@@ -9614,7 +9614,7 @@
       </p:sp>
       <p:sp>
         <p:nvSpPr>
-          <p:cNvPr id="1597661264" name="Text 1"/>
+          <p:cNvPr id="141130244" name="Text 1"/>
           <p:cNvSpPr/>
           <p:nvPr/>
         </p:nvSpPr>
@@ -9654,7 +9654,7 @@
       </p:sp>
       <p:sp>
         <p:nvSpPr>
-          <p:cNvPr id="1495048286" name="Text 2"/>
+          <p:cNvPr id="693928828" name="Text 2"/>
           <p:cNvSpPr/>
           <p:nvPr/>
         </p:nvSpPr>
@@ -9694,7 +9694,7 @@
       </p:sp>
       <p:sp>
         <p:nvSpPr>
-          <p:cNvPr id="1862890514" name="Shape 3"/>
+          <p:cNvPr id="309101466" name="Shape 3"/>
           <p:cNvSpPr/>
           <p:nvPr/>
         </p:nvSpPr>
@@ -9728,7 +9728,7 @@
       </p:sp>
       <p:pic>
         <p:nvPicPr>
-          <p:cNvPr id="1609388046" name="Image 0" descr="preencoded.png"/>
+          <p:cNvPr id="234592410" name="Image 0" descr="preencoded.png"/>
           <p:cNvPicPr>
             <a:picLocks noChangeAspect="1"/>
           </p:cNvPicPr>
@@ -9750,7 +9750,7 @@
       </p:pic>
       <p:sp>
         <p:nvSpPr>
-          <p:cNvPr id="130794156" name="Text 4"/>
+          <p:cNvPr id="853790905" name="Text 4"/>
           <p:cNvSpPr/>
           <p:nvPr/>
         </p:nvSpPr>
@@ -9790,7 +9790,7 @@
       </p:sp>
       <p:sp>
         <p:nvSpPr>
-          <p:cNvPr id="1932107164" name="Text 5"/>
+          <p:cNvPr id="1968703308" name="Text 5"/>
           <p:cNvSpPr/>
           <p:nvPr/>
         </p:nvSpPr>
@@ -9830,7 +9830,7 @@
       </p:sp>
       <p:sp>
         <p:nvSpPr>
-          <p:cNvPr id="90111453" name="Shape 6"/>
+          <p:cNvPr id="226156882" name="Shape 6"/>
           <p:cNvSpPr/>
           <p:nvPr/>
         </p:nvSpPr>
@@ -9864,7 +9864,7 @@
       </p:sp>
       <p:pic>
         <p:nvPicPr>
-          <p:cNvPr id="1151996299" name="Image 1" descr="preencoded.png"/>
+          <p:cNvPr id="708938594" name="Image 1" descr="preencoded.png"/>
           <p:cNvPicPr>
             <a:picLocks noChangeAspect="1"/>
           </p:cNvPicPr>
@@ -9886,7 +9886,7 @@
       </p:pic>
       <p:sp>
         <p:nvSpPr>
-          <p:cNvPr id="1716699334" name="Text 7"/>
+          <p:cNvPr id="1939518157" name="Text 7"/>
           <p:cNvSpPr/>
           <p:nvPr/>
         </p:nvSpPr>
@@ -9926,7 +9926,7 @@
       </p:sp>
       <p:sp>
         <p:nvSpPr>
-          <p:cNvPr id="1778515993" name="Text 8"/>
+          <p:cNvPr id="1950410647" name="Text 8"/>
           <p:cNvSpPr/>
           <p:nvPr/>
         </p:nvSpPr>
@@ -9966,7 +9966,7 @@
       </p:sp>
       <p:sp>
         <p:nvSpPr>
-          <p:cNvPr id="1430859075" name="Shape 9"/>
+          <p:cNvPr id="279586947" name="Shape 9"/>
           <p:cNvSpPr/>
           <p:nvPr/>
         </p:nvSpPr>
@@ -10000,7 +10000,7 @@
       </p:sp>
       <p:pic>
         <p:nvPicPr>
-          <p:cNvPr id="1987441843" name="Image 2" descr="preencoded.png"/>
+          <p:cNvPr id="980454356" name="Image 2" descr="preencoded.png"/>
           <p:cNvPicPr>
             <a:picLocks noChangeAspect="1"/>
           </p:cNvPicPr>
@@ -10022,7 +10022,7 @@
       </p:pic>
       <p:sp>
         <p:nvSpPr>
-          <p:cNvPr id="715432146" name="Text 10"/>
+          <p:cNvPr id="1001469971" name="Text 10"/>
           <p:cNvSpPr/>
           <p:nvPr/>
         </p:nvSpPr>
@@ -10062,7 +10062,7 @@
       </p:sp>
       <p:sp>
         <p:nvSpPr>
-          <p:cNvPr id="1651934084" name="Text 11"/>
+          <p:cNvPr id="1056966630" name="Text 11"/>
           <p:cNvSpPr/>
           <p:nvPr/>
         </p:nvSpPr>
@@ -10102,7 +10102,7 @@
       </p:sp>
       <p:sp>
         <p:nvSpPr>
-          <p:cNvPr id="1810834105" name="Shape 12"/>
+          <p:cNvPr id="1115401229" name="Shape 12"/>
           <p:cNvSpPr/>
           <p:nvPr/>
         </p:nvSpPr>
@@ -10136,7 +10136,7 @@
       </p:sp>
       <p:pic>
         <p:nvPicPr>
-          <p:cNvPr id="1133034378" name="Image 3" descr="preencoded.png"/>
+          <p:cNvPr id="1832414934" name="Image 3" descr="preencoded.png"/>
           <p:cNvPicPr>
             <a:picLocks noChangeAspect="1"/>
           </p:cNvPicPr>
@@ -10158,7 +10158,7 @@
       </p:pic>
       <p:sp>
         <p:nvSpPr>
-          <p:cNvPr id="935252494" name="Text 13"/>
+          <p:cNvPr id="817857642" name="Text 13"/>
           <p:cNvSpPr/>
           <p:nvPr/>
         </p:nvSpPr>
@@ -10198,7 +10198,7 @@
       </p:sp>
       <p:sp>
         <p:nvSpPr>
-          <p:cNvPr id="1498251952" name="Text 14"/>
+          <p:cNvPr id="2028257684" name="Text 14"/>
           <p:cNvSpPr/>
           <p:nvPr/>
         </p:nvSpPr>
@@ -10238,7 +10238,7 @@
       </p:sp>
       <p:sp>
         <p:nvSpPr>
-          <p:cNvPr id="477805742" name="Text 15"/>
+          <p:cNvPr id="1298220486" name="Text 15"/>
           <p:cNvSpPr/>
           <p:nvPr/>
         </p:nvSpPr>
@@ -10278,7 +10278,7 @@
       </p:sp>
       <p:sp>
         <p:nvSpPr>
-          <p:cNvPr id="1343943880" name="Text 16"/>
+          <p:cNvPr id="1703356985" name="Text 16"/>
           <p:cNvSpPr/>
           <p:nvPr/>
         </p:nvSpPr>
@@ -10358,7 +10358,7 @@
       </p:grpSpPr>
       <p:sp>
         <p:nvSpPr>
-          <p:cNvPr id="686162464" name="Text 0"/>
+          <p:cNvPr id="219146381" name="Text 0"/>
           <p:cNvSpPr/>
           <p:nvPr/>
         </p:nvSpPr>
@@ -10398,7 +10398,7 @@
       </p:sp>
       <p:sp>
         <p:nvSpPr>
-          <p:cNvPr id="1601378583" name="Text 1"/>
+          <p:cNvPr id="1567652191" name="Text 1"/>
           <p:cNvSpPr/>
           <p:nvPr/>
         </p:nvSpPr>
@@ -10438,7 +10438,7 @@
       </p:sp>
       <p:sp>
         <p:nvSpPr>
-          <p:cNvPr id="1863002649" name="Text 2"/>
+          <p:cNvPr id="1720534211" name="Text 2"/>
           <p:cNvSpPr/>
           <p:nvPr/>
         </p:nvSpPr>
@@ -10478,7 +10478,7 @@
       </p:sp>
       <p:pic>
         <p:nvPicPr>
-          <p:cNvPr id="1462037702" name="Image 0" descr="preencoded.png"/>
+          <p:cNvPr id="1801478808" name="Image 0" descr="preencoded.png"/>
           <p:cNvPicPr>
             <a:picLocks noChangeAspect="1"/>
           </p:cNvPicPr>
@@ -10500,7 +10500,7 @@
       </p:pic>
       <p:sp>
         <p:nvSpPr>
-          <p:cNvPr id="1948503554" name="Text 3"/>
+          <p:cNvPr id="1883985890" name="Text 3"/>
           <p:cNvSpPr/>
           <p:nvPr/>
         </p:nvSpPr>
@@ -10540,7 +10540,7 @@
       </p:sp>
       <p:sp>
         <p:nvSpPr>
-          <p:cNvPr id="175690691" name="Text 4"/>
+          <p:cNvPr id="916067637" name="Text 4"/>
           <p:cNvSpPr/>
           <p:nvPr/>
         </p:nvSpPr>
@@ -10580,7 +10580,7 @@
       </p:sp>
       <p:pic>
         <p:nvPicPr>
-          <p:cNvPr id="1197451977" name="Image 1" descr="preencoded.png"/>
+          <p:cNvPr id="2106417733" name="Image 1" descr="preencoded.png"/>
           <p:cNvPicPr>
             <a:picLocks noChangeAspect="1"/>
           </p:cNvPicPr>
@@ -10602,7 +10602,7 @@
       </p:pic>
       <p:sp>
         <p:nvSpPr>
-          <p:cNvPr id="1925063645" name="Text 5"/>
+          <p:cNvPr id="508309533" name="Text 5"/>
           <p:cNvSpPr/>
           <p:nvPr/>
         </p:nvSpPr>
@@ -10642,7 +10642,7 @@
       </p:sp>
       <p:sp>
         <p:nvSpPr>
-          <p:cNvPr id="665448470" name="Text 6"/>
+          <p:cNvPr id="238815816" name="Text 6"/>
           <p:cNvSpPr/>
           <p:nvPr/>
         </p:nvSpPr>
@@ -10682,7 +10682,7 @@
       </p:sp>
       <p:pic>
         <p:nvPicPr>
-          <p:cNvPr id="1735293332" name="Image 2" descr="preencoded.png"/>
+          <p:cNvPr id="252581373" name="Image 2" descr="preencoded.png"/>
           <p:cNvPicPr>
             <a:picLocks noChangeAspect="1"/>
           </p:cNvPicPr>
@@ -10704,7 +10704,7 @@
       </p:pic>
       <p:sp>
         <p:nvSpPr>
-          <p:cNvPr id="1939790596" name="Text 7"/>
+          <p:cNvPr id="1032465829" name="Text 7"/>
           <p:cNvSpPr/>
           <p:nvPr/>
         </p:nvSpPr>
@@ -10744,7 +10744,7 @@
       </p:sp>
       <p:sp>
         <p:nvSpPr>
-          <p:cNvPr id="1606260160" name="Text 8"/>
+          <p:cNvPr id="1636354477" name="Text 8"/>
           <p:cNvSpPr/>
           <p:nvPr/>
         </p:nvSpPr>
@@ -10784,7 +10784,7 @@
       </p:sp>
       <p:pic>
         <p:nvPicPr>
-          <p:cNvPr id="1845857248" name="Image 3" descr="preencoded.png"/>
+          <p:cNvPr id="2123963962" name="Image 3" descr="preencoded.png"/>
           <p:cNvPicPr>
             <a:picLocks noChangeAspect="1"/>
           </p:cNvPicPr>
@@ -10806,7 +10806,7 @@
       </p:pic>
       <p:sp>
         <p:nvSpPr>
-          <p:cNvPr id="1920712013" name="Text 9"/>
+          <p:cNvPr id="1966237343" name="Text 9"/>
           <p:cNvSpPr/>
           <p:nvPr/>
         </p:nvSpPr>
@@ -10846,7 +10846,7 @@
       </p:sp>
       <p:sp>
         <p:nvSpPr>
-          <p:cNvPr id="509669741" name="Text 10"/>
+          <p:cNvPr id="498586721" name="Text 10"/>
           <p:cNvSpPr/>
           <p:nvPr/>
         </p:nvSpPr>
@@ -10886,47 +10886,13 @@
       </p:sp>
       <p:sp>
         <p:nvSpPr>
-          <p:cNvPr id="1271668869" name="Shape 11"/>
-          <p:cNvSpPr/>
-          <p:nvPr/>
-        </p:nvSpPr>
-        <p:spPr bwMode="auto">
-          <a:xfrm>
-            <a:off x="6492240" y="1965960"/>
-            <a:ext cx="5120640" cy="4160519"/>
-          </a:xfrm>
-          <a:prstGeom prst="roundRect">
-            <a:avLst>
-              <a:gd name="adj" fmla="val 2637"/>
-            </a:avLst>
-          </a:prstGeom>
-          <a:solidFill>
-            <a:srgbClr val="F8FAFC"/>
-          </a:solidFill>
-          <a:ln w="12700">
-            <a:solidFill>
-              <a:srgbClr val="E2E8F0"/>
-            </a:solidFill>
-            <a:prstDash val="solid"/>
-          </a:ln>
-          <a:effectLst>
-            <a:outerShdw blurRad="177800" dist="38100" dir="5400000" sx="100000" sy="100000" kx="0" ky="0" algn="bl" rotWithShape="0">
-              <a:srgbClr val="312E81">
-                <a:alpha val="22000"/>
-              </a:srgbClr>
-            </a:outerShdw>
-          </a:effectLst>
-        </p:spPr>
-      </p:sp>
-      <p:sp>
-        <p:nvSpPr>
-          <p:cNvPr id="942192137" name="Shape 12"/>
-          <p:cNvSpPr/>
-          <p:nvPr/>
-        </p:nvSpPr>
-        <p:spPr bwMode="auto">
-          <a:xfrm>
-            <a:off x="6492240" y="1965960"/>
+          <p:cNvPr id="1419971662" name="Shape 12"/>
+          <p:cNvSpPr/>
+          <p:nvPr/>
+        </p:nvSpPr>
+        <p:spPr bwMode="auto">
+          <a:xfrm>
+            <a:off x="6492240" y="1857983"/>
             <a:ext cx="5120640" cy="457200"/>
           </a:xfrm>
           <a:prstGeom prst="roundRect">
@@ -10942,13 +10908,13 @@
       </p:sp>
       <p:sp>
         <p:nvSpPr>
-          <p:cNvPr id="1581262554" name="Shape 13"/>
-          <p:cNvSpPr/>
-          <p:nvPr/>
-        </p:nvSpPr>
-        <p:spPr bwMode="auto">
-          <a:xfrm>
-            <a:off x="6492240" y="2221992"/>
+          <p:cNvPr id="555354363" name="Shape 13"/>
+          <p:cNvSpPr/>
+          <p:nvPr/>
+        </p:nvSpPr>
+        <p:spPr bwMode="auto">
+          <a:xfrm>
+            <a:off x="6492240" y="2114015"/>
             <a:ext cx="5120640" cy="201168"/>
           </a:xfrm>
           <a:prstGeom prst="rect">
@@ -10962,13 +10928,13 @@
       </p:sp>
       <p:sp>
         <p:nvSpPr>
-          <p:cNvPr id="1689724581" name="Shape 14"/>
-          <p:cNvSpPr/>
-          <p:nvPr/>
-        </p:nvSpPr>
-        <p:spPr bwMode="auto">
-          <a:xfrm>
-            <a:off x="6693408" y="2130552"/>
+          <p:cNvPr id="1927254507" name="Shape 14"/>
+          <p:cNvSpPr/>
+          <p:nvPr/>
+        </p:nvSpPr>
+        <p:spPr bwMode="auto">
+          <a:xfrm>
+            <a:off x="6693408" y="2022575"/>
             <a:ext cx="128016" cy="128016"/>
           </a:xfrm>
           <a:prstGeom prst="ellipse">
@@ -10982,13 +10948,13 @@
       </p:sp>
       <p:sp>
         <p:nvSpPr>
-          <p:cNvPr id="1810283546" name="Shape 15"/>
-          <p:cNvSpPr/>
-          <p:nvPr/>
-        </p:nvSpPr>
-        <p:spPr bwMode="auto">
-          <a:xfrm>
-            <a:off x="6949440" y="2130552"/>
+          <p:cNvPr id="1054822211" name="Shape 15"/>
+          <p:cNvSpPr/>
+          <p:nvPr/>
+        </p:nvSpPr>
+        <p:spPr bwMode="auto">
+          <a:xfrm>
+            <a:off x="6949440" y="2022575"/>
             <a:ext cx="128016" cy="128016"/>
           </a:xfrm>
           <a:prstGeom prst="ellipse">
@@ -11002,13 +10968,13 @@
       </p:sp>
       <p:sp>
         <p:nvSpPr>
-          <p:cNvPr id="394661319" name="Shape 16"/>
-          <p:cNvSpPr/>
-          <p:nvPr/>
-        </p:nvSpPr>
-        <p:spPr bwMode="auto">
-          <a:xfrm>
-            <a:off x="7205471" y="2130552"/>
+          <p:cNvPr id="557412682" name="Shape 16"/>
+          <p:cNvSpPr/>
+          <p:nvPr/>
+        </p:nvSpPr>
+        <p:spPr bwMode="auto">
+          <a:xfrm>
+            <a:off x="7205470" y="2022575"/>
             <a:ext cx="128016" cy="128016"/>
           </a:xfrm>
           <a:prstGeom prst="ellipse">
@@ -11022,13 +10988,13 @@
       </p:sp>
       <p:sp>
         <p:nvSpPr>
-          <p:cNvPr id="237843578" name="Text 17"/>
-          <p:cNvSpPr/>
-          <p:nvPr/>
-        </p:nvSpPr>
-        <p:spPr bwMode="auto">
-          <a:xfrm>
-            <a:off x="7680960" y="2075688"/>
+          <p:cNvPr id="38209859" name="Text 17"/>
+          <p:cNvSpPr/>
+          <p:nvPr/>
+        </p:nvSpPr>
+        <p:spPr bwMode="auto">
+          <a:xfrm>
+            <a:off x="7680960" y="1967711"/>
             <a:ext cx="3657600" cy="274320"/>
           </a:xfrm>
           <a:prstGeom prst="rect">
@@ -11046,7 +11012,7 @@
               <a:defRPr/>
             </a:pPr>
             <a:r>
-              <a:rPr lang="en-US" sz="1000">
+              <a:rPr lang="en-US" sz="1000" b="0" i="0" u="none" strike="noStrike" cap="none" spc="0">
                 <a:solidFill>
                   <a:srgbClr val="E0E7FF"/>
                 </a:solidFill>
@@ -11054,7 +11020,7 @@
                 <a:ea typeface="Calibri"/>
                 <a:cs typeface="Calibri"/>
               </a:rPr>
-              <a:t>markit.app/attendance</a:t>
+              <a:t>bumarkit.vercel.app/attendance/take</a:t>
             </a:r>
             <a:endParaRPr lang="en-US" sz="1000"/>
           </a:p>
@@ -11062,993 +11028,107 @@
       </p:sp>
       <p:sp>
         <p:nvSpPr>
-          <p:cNvPr id="926097976" name="Text 18"/>
-          <p:cNvSpPr/>
-          <p:nvPr/>
-        </p:nvSpPr>
-        <p:spPr bwMode="auto">
-          <a:xfrm>
-            <a:off x="6766560" y="2587752"/>
-            <a:ext cx="4572000" cy="292608"/>
-          </a:xfrm>
-          <a:prstGeom prst="rect">
-            <a:avLst/>
-          </a:prstGeom>
-          <a:noFill/>
-          <a:ln/>
-        </p:spPr>
-        <p:txBody>
-          <a:bodyPr wrap="square" lIns="0" tIns="0" rIns="0" bIns="0" rtlCol="0" anchor="ctr"/>
-          <a:lstStyle/>
-          <a:p>
-            <a:pPr marL="0" indent="0">
-              <a:buNone/>
-              <a:defRPr/>
-            </a:pPr>
-            <a:r>
-              <a:rPr lang="en-US" sz="1400" b="1">
-                <a:solidFill>
-                  <a:srgbClr val="0F172A"/>
-                </a:solidFill>
-                <a:latin typeface="Arial"/>
-                <a:ea typeface="Arial"/>
-                <a:cs typeface="Arial"/>
-              </a:rPr>
-              <a:t>CS301 · Section A</a:t>
-            </a:r>
-            <a:endParaRPr lang="en-US" sz="1400"/>
-          </a:p>
-        </p:txBody>
-      </p:sp>
-      <p:sp>
-        <p:nvSpPr>
-          <p:cNvPr id="789181438" name="Shape 19"/>
-          <p:cNvSpPr/>
-          <p:nvPr/>
-        </p:nvSpPr>
-        <p:spPr bwMode="auto">
-          <a:xfrm>
-            <a:off x="6766560" y="2926080"/>
-            <a:ext cx="1371600" cy="310896"/>
-          </a:xfrm>
-          <a:prstGeom prst="roundRect">
-            <a:avLst>
-              <a:gd name="adj" fmla="val 50000"/>
-            </a:avLst>
-          </a:prstGeom>
-          <a:solidFill>
-            <a:srgbClr val="F0FDF4"/>
-          </a:solidFill>
-          <a:ln/>
-        </p:spPr>
-      </p:sp>
-      <p:sp>
-        <p:nvSpPr>
-          <p:cNvPr id="59779604" name="Text 20"/>
-          <p:cNvSpPr/>
-          <p:nvPr/>
-        </p:nvSpPr>
-        <p:spPr bwMode="auto">
-          <a:xfrm>
-            <a:off x="6766560" y="2926080"/>
-            <a:ext cx="1371600" cy="310896"/>
-          </a:xfrm>
-          <a:prstGeom prst="rect">
-            <a:avLst/>
-          </a:prstGeom>
-          <a:noFill/>
-          <a:ln/>
-        </p:spPr>
-        <p:txBody>
-          <a:bodyPr wrap="square" lIns="0" tIns="0" rIns="0" bIns="0" rtlCol="0" anchor="ctr"/>
-          <a:lstStyle/>
-          <a:p>
-            <a:pPr marL="0" indent="0" algn="ctr">
-              <a:buNone/>
-              <a:defRPr/>
-            </a:pPr>
-            <a:r>
-              <a:rPr lang="en-US" sz="1050" b="1">
-                <a:solidFill>
-                  <a:srgbClr val="15803D"/>
+          <p:cNvPr id="608033764" name="Text 48"/>
+          <p:cNvSpPr/>
+          <p:nvPr/>
+        </p:nvSpPr>
+        <p:spPr bwMode="auto">
+          <a:xfrm>
+            <a:off x="457200" y="6473952"/>
+            <a:ext cx="5486400" cy="274320"/>
+          </a:xfrm>
+          <a:prstGeom prst="rect">
+            <a:avLst/>
+          </a:prstGeom>
+          <a:noFill/>
+          <a:ln/>
+        </p:spPr>
+        <p:txBody>
+          <a:bodyPr wrap="square" lIns="0" tIns="0" rIns="0" bIns="0" rtlCol="0" anchor="ctr"/>
+          <a:lstStyle/>
+          <a:p>
+            <a:pPr marL="0" indent="0" algn="l">
+              <a:buNone/>
+              <a:defRPr/>
+            </a:pPr>
+            <a:r>
+              <a:rPr lang="en-US" sz="900">
+                <a:solidFill>
+                  <a:srgbClr val="64748B"/>
                 </a:solidFill>
                 <a:latin typeface="Calibri"/>
                 <a:ea typeface="Calibri"/>
                 <a:cs typeface="Calibri"/>
               </a:rPr>
-              <a:t>Present 27</a:t>
-            </a:r>
-            <a:endParaRPr lang="en-US" sz="1050"/>
-          </a:p>
-        </p:txBody>
-      </p:sp>
-      <p:sp>
-        <p:nvSpPr>
-          <p:cNvPr id="1421545194" name="Shape 21"/>
-          <p:cNvSpPr/>
-          <p:nvPr/>
-        </p:nvSpPr>
-        <p:spPr bwMode="auto">
-          <a:xfrm>
-            <a:off x="8275320" y="2926080"/>
-            <a:ext cx="1234440" cy="310896"/>
-          </a:xfrm>
-          <a:prstGeom prst="roundRect">
-            <a:avLst>
-              <a:gd name="adj" fmla="val 50000"/>
-            </a:avLst>
-          </a:prstGeom>
-          <a:solidFill>
-            <a:srgbClr val="FEF2F2"/>
-          </a:solidFill>
-          <a:ln/>
-        </p:spPr>
-      </p:sp>
-      <p:sp>
-        <p:nvSpPr>
-          <p:cNvPr id="765251273" name="Text 22"/>
-          <p:cNvSpPr/>
-          <p:nvPr/>
-        </p:nvSpPr>
-        <p:spPr bwMode="auto">
-          <a:xfrm>
-            <a:off x="8275320" y="2926080"/>
-            <a:ext cx="1234440" cy="310896"/>
-          </a:xfrm>
-          <a:prstGeom prst="rect">
-            <a:avLst/>
-          </a:prstGeom>
-          <a:noFill/>
-          <a:ln/>
-        </p:spPr>
-        <p:txBody>
-          <a:bodyPr wrap="square" lIns="0" tIns="0" rIns="0" bIns="0" rtlCol="0" anchor="ctr"/>
-          <a:lstStyle/>
-          <a:p>
-            <a:pPr marL="0" indent="0" algn="ctr">
-              <a:buNone/>
-              <a:defRPr/>
-            </a:pPr>
-            <a:r>
-              <a:rPr lang="en-US" sz="1050" b="1">
-                <a:solidFill>
-                  <a:srgbClr val="B91C1C"/>
+              <a:t>MarkIt  ·  Our Solution</a:t>
+            </a:r>
+            <a:endParaRPr lang="en-US" sz="900"/>
+          </a:p>
+        </p:txBody>
+      </p:sp>
+      <p:sp>
+        <p:nvSpPr>
+          <p:cNvPr id="1068139460" name="Text 49"/>
+          <p:cNvSpPr/>
+          <p:nvPr/>
+        </p:nvSpPr>
+        <p:spPr bwMode="auto">
+          <a:xfrm>
+            <a:off x="11277294" y="5623767"/>
+            <a:ext cx="457200" cy="274320"/>
+          </a:xfrm>
+          <a:prstGeom prst="rect">
+            <a:avLst/>
+          </a:prstGeom>
+          <a:noFill/>
+          <a:ln/>
+        </p:spPr>
+        <p:txBody>
+          <a:bodyPr wrap="square" lIns="0" tIns="0" rIns="0" bIns="0" rtlCol="0" anchor="ctr"/>
+          <a:lstStyle/>
+          <a:p>
+            <a:pPr marL="0" indent="0" algn="r">
+              <a:buNone/>
+              <a:defRPr/>
+            </a:pPr>
+            <a:r>
+              <a:rPr lang="en-US" sz="900">
+                <a:solidFill>
+                  <a:srgbClr val="64748B"/>
                 </a:solidFill>
                 <a:latin typeface="Calibri"/>
                 <a:ea typeface="Calibri"/>
                 <a:cs typeface="Calibri"/>
               </a:rPr>
-              <a:t>Absent 3</a:t>
-            </a:r>
-            <a:endParaRPr lang="en-US" sz="1050"/>
-          </a:p>
-        </p:txBody>
-      </p:sp>
-      <p:sp>
-        <p:nvSpPr>
-          <p:cNvPr id="400026183" name="Shape 23"/>
-          <p:cNvSpPr/>
-          <p:nvPr/>
-        </p:nvSpPr>
-        <p:spPr bwMode="auto">
-          <a:xfrm>
-            <a:off x="6766560" y="3447288"/>
-            <a:ext cx="4572000" cy="365760"/>
-          </a:xfrm>
-          <a:prstGeom prst="roundRect">
-            <a:avLst>
-              <a:gd name="adj" fmla="val 15000"/>
-            </a:avLst>
-          </a:prstGeom>
-          <a:solidFill>
-            <a:srgbClr val="FFFFFF"/>
-          </a:solidFill>
-          <a:ln w="9525">
-            <a:solidFill>
-              <a:srgbClr val="E2E8F0"/>
-            </a:solidFill>
-            <a:prstDash val="solid"/>
-          </a:ln>
-        </p:spPr>
-      </p:sp>
-      <p:sp>
-        <p:nvSpPr>
-          <p:cNvPr id="1449338481" name="Shape 24"/>
-          <p:cNvSpPr/>
-          <p:nvPr/>
-        </p:nvSpPr>
-        <p:spPr bwMode="auto">
-          <a:xfrm>
-            <a:off x="6876288" y="3520440"/>
-            <a:ext cx="219456" cy="219456"/>
-          </a:xfrm>
-          <a:prstGeom prst="ellipse">
-            <a:avLst/>
-          </a:prstGeom>
-          <a:solidFill>
-            <a:srgbClr val="EEF2FF"/>
-          </a:solidFill>
-          <a:ln/>
-        </p:spPr>
-      </p:sp>
-      <p:sp>
-        <p:nvSpPr>
-          <p:cNvPr id="668700829" name="Text 25"/>
-          <p:cNvSpPr/>
-          <p:nvPr/>
-        </p:nvSpPr>
-        <p:spPr bwMode="auto">
-          <a:xfrm>
-            <a:off x="7205471" y="3447288"/>
-            <a:ext cx="2194560" cy="365760"/>
-          </a:xfrm>
-          <a:prstGeom prst="rect">
-            <a:avLst/>
-          </a:prstGeom>
-          <a:noFill/>
-          <a:ln/>
-        </p:spPr>
-        <p:txBody>
-          <a:bodyPr wrap="square" lIns="0" tIns="0" rIns="0" bIns="0" rtlCol="0" anchor="ctr"/>
-          <a:lstStyle/>
-          <a:p>
-            <a:pPr marL="0" indent="0">
-              <a:buNone/>
-              <a:defRPr/>
-            </a:pPr>
-            <a:r>
-              <a:rPr lang="en-US" sz="1050">
-                <a:solidFill>
-                  <a:srgbClr val="1E293B"/>
-                </a:solidFill>
-                <a:latin typeface="Calibri"/>
-                <a:ea typeface="Calibri"/>
-                <a:cs typeface="Calibri"/>
-              </a:rPr>
-              <a:t>Ayesha Rahman</a:t>
-            </a:r>
-            <a:endParaRPr lang="en-US" sz="1050"/>
-          </a:p>
-        </p:txBody>
-      </p:sp>
-      <p:sp>
-        <p:nvSpPr>
-          <p:cNvPr id="117588303" name="Shape 26"/>
-          <p:cNvSpPr/>
-          <p:nvPr/>
-        </p:nvSpPr>
-        <p:spPr bwMode="auto">
-          <a:xfrm>
-            <a:off x="10195560" y="3502152"/>
-            <a:ext cx="1005840" cy="256032"/>
-          </a:xfrm>
-          <a:prstGeom prst="roundRect">
-            <a:avLst>
-              <a:gd name="adj" fmla="val 50000"/>
-            </a:avLst>
-          </a:prstGeom>
-          <a:solidFill>
-            <a:srgbClr val="F0FDF4"/>
-          </a:solidFill>
-          <a:ln/>
-        </p:spPr>
-      </p:sp>
-      <p:sp>
-        <p:nvSpPr>
-          <p:cNvPr id="897506085" name="Text 27"/>
-          <p:cNvSpPr/>
-          <p:nvPr/>
-        </p:nvSpPr>
-        <p:spPr bwMode="auto">
-          <a:xfrm>
-            <a:off x="10195560" y="3502152"/>
-            <a:ext cx="1005840" cy="256032"/>
-          </a:xfrm>
-          <a:prstGeom prst="rect">
-            <a:avLst/>
-          </a:prstGeom>
-          <a:noFill/>
-          <a:ln/>
-        </p:spPr>
-        <p:txBody>
-          <a:bodyPr wrap="square" lIns="0" tIns="0" rIns="0" bIns="0" rtlCol="0" anchor="ctr"/>
-          <a:lstStyle/>
-          <a:p>
-            <a:pPr marL="0" indent="0" algn="ctr">
-              <a:buNone/>
-              <a:defRPr/>
-            </a:pPr>
-            <a:r>
-              <a:rPr lang="en-US" sz="900" b="1">
-                <a:solidFill>
-                  <a:srgbClr val="15803D"/>
-                </a:solidFill>
-                <a:latin typeface="Calibri"/>
-                <a:ea typeface="Calibri"/>
-                <a:cs typeface="Calibri"/>
-              </a:rPr>
-              <a:t>Present</a:t>
+              <a:t>4</a:t>
             </a:r>
             <a:endParaRPr lang="en-US" sz="900"/>
           </a:p>
         </p:txBody>
       </p:sp>
-      <p:sp>
-        <p:nvSpPr>
-          <p:cNvPr id="615356234" name="Shape 28"/>
-          <p:cNvSpPr/>
-          <p:nvPr/>
-        </p:nvSpPr>
-        <p:spPr bwMode="auto">
-          <a:xfrm>
-            <a:off x="6766560" y="3904488"/>
-            <a:ext cx="4572000" cy="365760"/>
-          </a:xfrm>
-          <a:prstGeom prst="roundRect">
-            <a:avLst>
-              <a:gd name="adj" fmla="val 15000"/>
-            </a:avLst>
-          </a:prstGeom>
-          <a:solidFill>
-            <a:srgbClr val="FFFFFF"/>
-          </a:solidFill>
-          <a:ln w="9525">
-            <a:solidFill>
-              <a:srgbClr val="E2E8F0"/>
-            </a:solidFill>
-            <a:prstDash val="solid"/>
-          </a:ln>
-        </p:spPr>
-      </p:sp>
-      <p:sp>
-        <p:nvSpPr>
-          <p:cNvPr id="790855159" name="Shape 29"/>
-          <p:cNvSpPr/>
-          <p:nvPr/>
-        </p:nvSpPr>
-        <p:spPr bwMode="auto">
-          <a:xfrm>
-            <a:off x="6876288" y="3977640"/>
-            <a:ext cx="219456" cy="219456"/>
-          </a:xfrm>
-          <a:prstGeom prst="ellipse">
-            <a:avLst/>
-          </a:prstGeom>
-          <a:solidFill>
-            <a:srgbClr val="EEF2FF"/>
-          </a:solidFill>
-          <a:ln/>
-        </p:spPr>
-      </p:sp>
-      <p:sp>
-        <p:nvSpPr>
-          <p:cNvPr id="1208441102" name="Text 30"/>
-          <p:cNvSpPr/>
-          <p:nvPr/>
-        </p:nvSpPr>
-        <p:spPr bwMode="auto">
-          <a:xfrm>
-            <a:off x="7205471" y="3904488"/>
-            <a:ext cx="2194560" cy="365760"/>
-          </a:xfrm>
-          <a:prstGeom prst="rect">
-            <a:avLst/>
-          </a:prstGeom>
-          <a:noFill/>
-          <a:ln/>
-        </p:spPr>
-        <p:txBody>
-          <a:bodyPr wrap="square" lIns="0" tIns="0" rIns="0" bIns="0" rtlCol="0" anchor="ctr"/>
-          <a:lstStyle/>
-          <a:p>
-            <a:pPr marL="0" indent="0">
-              <a:buNone/>
-              <a:defRPr/>
-            </a:pPr>
-            <a:r>
-              <a:rPr lang="en-US" sz="1050">
-                <a:solidFill>
-                  <a:srgbClr val="1E293B"/>
-                </a:solidFill>
-                <a:latin typeface="Calibri"/>
-                <a:ea typeface="Calibri"/>
-                <a:cs typeface="Calibri"/>
-              </a:rPr>
-              <a:t>Tanvir Ahmed</a:t>
-            </a:r>
-            <a:endParaRPr lang="en-US" sz="1050"/>
-          </a:p>
-        </p:txBody>
-      </p:sp>
-      <p:sp>
-        <p:nvSpPr>
-          <p:cNvPr id="772238300" name="Shape 31"/>
-          <p:cNvSpPr/>
-          <p:nvPr/>
-        </p:nvSpPr>
-        <p:spPr bwMode="auto">
-          <a:xfrm>
-            <a:off x="10195560" y="3959352"/>
-            <a:ext cx="1005840" cy="256032"/>
-          </a:xfrm>
-          <a:prstGeom prst="roundRect">
-            <a:avLst>
-              <a:gd name="adj" fmla="val 50000"/>
-            </a:avLst>
-          </a:prstGeom>
-          <a:solidFill>
-            <a:srgbClr val="F0FDF4"/>
-          </a:solidFill>
-          <a:ln/>
-        </p:spPr>
-      </p:sp>
-      <p:sp>
-        <p:nvSpPr>
-          <p:cNvPr id="733240568" name="Text 32"/>
-          <p:cNvSpPr/>
-          <p:nvPr/>
-        </p:nvSpPr>
-        <p:spPr bwMode="auto">
-          <a:xfrm>
-            <a:off x="10195560" y="3959352"/>
-            <a:ext cx="1005840" cy="256032"/>
-          </a:xfrm>
-          <a:prstGeom prst="rect">
-            <a:avLst/>
-          </a:prstGeom>
-          <a:noFill/>
-          <a:ln/>
-        </p:spPr>
-        <p:txBody>
-          <a:bodyPr wrap="square" lIns="0" tIns="0" rIns="0" bIns="0" rtlCol="0" anchor="ctr"/>
-          <a:lstStyle/>
-          <a:p>
-            <a:pPr marL="0" indent="0" algn="ctr">
-              <a:buNone/>
-              <a:defRPr/>
-            </a:pPr>
-            <a:r>
-              <a:rPr lang="en-US" sz="900" b="1">
-                <a:solidFill>
-                  <a:srgbClr val="15803D"/>
-                </a:solidFill>
-                <a:latin typeface="Calibri"/>
-                <a:ea typeface="Calibri"/>
-                <a:cs typeface="Calibri"/>
-              </a:rPr>
-              <a:t>Present</a:t>
-            </a:r>
-            <a:endParaRPr lang="en-US" sz="900"/>
-          </a:p>
-        </p:txBody>
-      </p:sp>
-      <p:sp>
-        <p:nvSpPr>
-          <p:cNvPr id="1314400889" name="Shape 33"/>
-          <p:cNvSpPr/>
-          <p:nvPr/>
-        </p:nvSpPr>
-        <p:spPr bwMode="auto">
-          <a:xfrm>
-            <a:off x="6766560" y="4361688"/>
-            <a:ext cx="4572000" cy="365760"/>
-          </a:xfrm>
-          <a:prstGeom prst="roundRect">
-            <a:avLst>
-              <a:gd name="adj" fmla="val 15000"/>
-            </a:avLst>
-          </a:prstGeom>
-          <a:solidFill>
-            <a:srgbClr val="FFFFFF"/>
-          </a:solidFill>
-          <a:ln w="9525">
-            <a:solidFill>
-              <a:srgbClr val="E2E8F0"/>
-            </a:solidFill>
-            <a:prstDash val="solid"/>
-          </a:ln>
-        </p:spPr>
-      </p:sp>
-      <p:sp>
-        <p:nvSpPr>
-          <p:cNvPr id="1197800383" name="Shape 34"/>
-          <p:cNvSpPr/>
-          <p:nvPr/>
-        </p:nvSpPr>
-        <p:spPr bwMode="auto">
-          <a:xfrm>
-            <a:off x="6876288" y="4434840"/>
-            <a:ext cx="219456" cy="219456"/>
-          </a:xfrm>
-          <a:prstGeom prst="ellipse">
-            <a:avLst/>
-          </a:prstGeom>
-          <a:solidFill>
-            <a:srgbClr val="CBD5E1"/>
-          </a:solidFill>
-          <a:ln/>
-        </p:spPr>
-      </p:sp>
-      <p:sp>
-        <p:nvSpPr>
-          <p:cNvPr id="1597174900" name="Text 35"/>
-          <p:cNvSpPr/>
-          <p:nvPr/>
-        </p:nvSpPr>
-        <p:spPr bwMode="auto">
-          <a:xfrm>
-            <a:off x="7205471" y="4361688"/>
-            <a:ext cx="2194560" cy="365760"/>
-          </a:xfrm>
-          <a:prstGeom prst="rect">
-            <a:avLst/>
-          </a:prstGeom>
-          <a:noFill/>
-          <a:ln/>
-        </p:spPr>
-        <p:txBody>
-          <a:bodyPr wrap="square" lIns="0" tIns="0" rIns="0" bIns="0" rtlCol="0" anchor="ctr"/>
-          <a:lstStyle/>
-          <a:p>
-            <a:pPr marL="0" indent="0">
-              <a:buNone/>
-              <a:defRPr/>
-            </a:pPr>
-            <a:r>
-              <a:rPr lang="en-US" sz="1050">
-                <a:solidFill>
-                  <a:srgbClr val="1E293B"/>
-                </a:solidFill>
-                <a:latin typeface="Calibri"/>
-                <a:ea typeface="Calibri"/>
-                <a:cs typeface="Calibri"/>
-              </a:rPr>
-              <a:t>Nusrat Jahan</a:t>
-            </a:r>
-            <a:endParaRPr lang="en-US" sz="1050"/>
-          </a:p>
-        </p:txBody>
-      </p:sp>
-      <p:sp>
-        <p:nvSpPr>
-          <p:cNvPr id="1876077401" name="Shape 36"/>
-          <p:cNvSpPr/>
-          <p:nvPr/>
-        </p:nvSpPr>
-        <p:spPr bwMode="auto">
-          <a:xfrm>
-            <a:off x="10195560" y="4416552"/>
-            <a:ext cx="1005840" cy="256032"/>
-          </a:xfrm>
-          <a:prstGeom prst="roundRect">
-            <a:avLst>
-              <a:gd name="adj" fmla="val 50000"/>
-            </a:avLst>
-          </a:prstGeom>
-          <a:solidFill>
-            <a:srgbClr val="FEF2F2"/>
-          </a:solidFill>
-          <a:ln/>
-        </p:spPr>
-      </p:sp>
-      <p:sp>
-        <p:nvSpPr>
-          <p:cNvPr id="626917745" name="Text 37"/>
-          <p:cNvSpPr/>
-          <p:nvPr/>
-        </p:nvSpPr>
-        <p:spPr bwMode="auto">
-          <a:xfrm>
-            <a:off x="10195560" y="4416552"/>
-            <a:ext cx="1005840" cy="256032"/>
-          </a:xfrm>
-          <a:prstGeom prst="rect">
-            <a:avLst/>
-          </a:prstGeom>
-          <a:noFill/>
-          <a:ln/>
-        </p:spPr>
-        <p:txBody>
-          <a:bodyPr wrap="square" lIns="0" tIns="0" rIns="0" bIns="0" rtlCol="0" anchor="ctr"/>
-          <a:lstStyle/>
-          <a:p>
-            <a:pPr marL="0" indent="0" algn="ctr">
-              <a:buNone/>
-              <a:defRPr/>
-            </a:pPr>
-            <a:r>
-              <a:rPr lang="en-US" sz="900" b="1">
-                <a:solidFill>
-                  <a:srgbClr val="B91C1C"/>
-                </a:solidFill>
-                <a:latin typeface="Calibri"/>
-                <a:ea typeface="Calibri"/>
-                <a:cs typeface="Calibri"/>
-              </a:rPr>
-              <a:t>Absent</a:t>
-            </a:r>
-            <a:endParaRPr lang="en-US" sz="900"/>
-          </a:p>
-        </p:txBody>
-      </p:sp>
-      <p:sp>
-        <p:nvSpPr>
-          <p:cNvPr id="1382107184" name="Shape 38"/>
-          <p:cNvSpPr/>
-          <p:nvPr/>
-        </p:nvSpPr>
-        <p:spPr bwMode="auto">
-          <a:xfrm>
-            <a:off x="6766560" y="4818888"/>
-            <a:ext cx="4572000" cy="365760"/>
-          </a:xfrm>
-          <a:prstGeom prst="roundRect">
-            <a:avLst>
-              <a:gd name="adj" fmla="val 15000"/>
-            </a:avLst>
-          </a:prstGeom>
-          <a:solidFill>
-            <a:srgbClr val="FFFFFF"/>
-          </a:solidFill>
-          <a:ln w="9525">
-            <a:solidFill>
-              <a:srgbClr val="E2E8F0"/>
-            </a:solidFill>
-            <a:prstDash val="solid"/>
-          </a:ln>
-        </p:spPr>
-      </p:sp>
-      <p:sp>
-        <p:nvSpPr>
-          <p:cNvPr id="1049008377" name="Shape 39"/>
-          <p:cNvSpPr/>
-          <p:nvPr/>
-        </p:nvSpPr>
-        <p:spPr bwMode="auto">
-          <a:xfrm>
-            <a:off x="6876288" y="4892039"/>
-            <a:ext cx="219456" cy="219456"/>
-          </a:xfrm>
-          <a:prstGeom prst="ellipse">
-            <a:avLst/>
-          </a:prstGeom>
-          <a:solidFill>
-            <a:srgbClr val="EEF2FF"/>
-          </a:solidFill>
-          <a:ln/>
-        </p:spPr>
-      </p:sp>
-      <p:sp>
-        <p:nvSpPr>
-          <p:cNvPr id="1740135457" name="Text 40"/>
-          <p:cNvSpPr/>
-          <p:nvPr/>
-        </p:nvSpPr>
-        <p:spPr bwMode="auto">
-          <a:xfrm>
-            <a:off x="7205471" y="4818888"/>
-            <a:ext cx="2194560" cy="365760"/>
-          </a:xfrm>
-          <a:prstGeom prst="rect">
-            <a:avLst/>
-          </a:prstGeom>
-          <a:noFill/>
-          <a:ln/>
-        </p:spPr>
-        <p:txBody>
-          <a:bodyPr wrap="square" lIns="0" tIns="0" rIns="0" bIns="0" rtlCol="0" anchor="ctr"/>
-          <a:lstStyle/>
-          <a:p>
-            <a:pPr marL="0" indent="0">
-              <a:buNone/>
-              <a:defRPr/>
-            </a:pPr>
-            <a:r>
-              <a:rPr lang="en-US" sz="1050">
-                <a:solidFill>
-                  <a:srgbClr val="1E293B"/>
-                </a:solidFill>
-                <a:latin typeface="Calibri"/>
-                <a:ea typeface="Calibri"/>
-                <a:cs typeface="Calibri"/>
-              </a:rPr>
-              <a:t>Kamal Hossain</a:t>
-            </a:r>
-            <a:endParaRPr lang="en-US" sz="1050"/>
-          </a:p>
-        </p:txBody>
-      </p:sp>
-      <p:sp>
-        <p:nvSpPr>
-          <p:cNvPr id="2109323502" name="Shape 41"/>
-          <p:cNvSpPr/>
-          <p:nvPr/>
-        </p:nvSpPr>
-        <p:spPr bwMode="auto">
-          <a:xfrm>
-            <a:off x="10195560" y="4873752"/>
-            <a:ext cx="1005840" cy="256032"/>
-          </a:xfrm>
-          <a:prstGeom prst="roundRect">
-            <a:avLst>
-              <a:gd name="adj" fmla="val 50000"/>
-            </a:avLst>
-          </a:prstGeom>
-          <a:solidFill>
-            <a:srgbClr val="F0FDF4"/>
-          </a:solidFill>
-          <a:ln/>
-        </p:spPr>
-      </p:sp>
-      <p:sp>
-        <p:nvSpPr>
-          <p:cNvPr id="498046953" name="Text 42"/>
-          <p:cNvSpPr/>
-          <p:nvPr/>
-        </p:nvSpPr>
-        <p:spPr bwMode="auto">
-          <a:xfrm>
-            <a:off x="10195560" y="4873752"/>
-            <a:ext cx="1005840" cy="256032"/>
-          </a:xfrm>
-          <a:prstGeom prst="rect">
-            <a:avLst/>
-          </a:prstGeom>
-          <a:noFill/>
-          <a:ln/>
-        </p:spPr>
-        <p:txBody>
-          <a:bodyPr wrap="square" lIns="0" tIns="0" rIns="0" bIns="0" rtlCol="0" anchor="ctr"/>
-          <a:lstStyle/>
-          <a:p>
-            <a:pPr marL="0" indent="0" algn="ctr">
-              <a:buNone/>
-              <a:defRPr/>
-            </a:pPr>
-            <a:r>
-              <a:rPr lang="en-US" sz="900" b="1">
-                <a:solidFill>
-                  <a:srgbClr val="15803D"/>
-                </a:solidFill>
-                <a:latin typeface="Calibri"/>
-                <a:ea typeface="Calibri"/>
-                <a:cs typeface="Calibri"/>
-              </a:rPr>
-              <a:t>Present</a:t>
-            </a:r>
-            <a:endParaRPr lang="en-US" sz="900"/>
-          </a:p>
-        </p:txBody>
-      </p:sp>
-      <p:sp>
-        <p:nvSpPr>
-          <p:cNvPr id="1266342216" name="Shape 43"/>
-          <p:cNvSpPr/>
-          <p:nvPr/>
-        </p:nvSpPr>
-        <p:spPr bwMode="auto">
-          <a:xfrm>
-            <a:off x="6766560" y="5276088"/>
-            <a:ext cx="4572000" cy="365760"/>
-          </a:xfrm>
-          <a:prstGeom prst="roundRect">
-            <a:avLst>
-              <a:gd name="adj" fmla="val 15000"/>
-            </a:avLst>
-          </a:prstGeom>
-          <a:solidFill>
-            <a:srgbClr val="FFFFFF"/>
-          </a:solidFill>
-          <a:ln w="9525">
-            <a:solidFill>
-              <a:srgbClr val="E2E8F0"/>
-            </a:solidFill>
-            <a:prstDash val="solid"/>
-          </a:ln>
-        </p:spPr>
-      </p:sp>
-      <p:sp>
-        <p:nvSpPr>
-          <p:cNvPr id="1757654849" name="Shape 44"/>
-          <p:cNvSpPr/>
-          <p:nvPr/>
-        </p:nvSpPr>
-        <p:spPr bwMode="auto">
-          <a:xfrm>
-            <a:off x="6876288" y="5349240"/>
-            <a:ext cx="219456" cy="219456"/>
-          </a:xfrm>
-          <a:prstGeom prst="ellipse">
-            <a:avLst/>
-          </a:prstGeom>
-          <a:solidFill>
-            <a:srgbClr val="EEF2FF"/>
-          </a:solidFill>
-          <a:ln/>
-        </p:spPr>
-      </p:sp>
-      <p:sp>
-        <p:nvSpPr>
-          <p:cNvPr id="1868511799" name="Text 45"/>
-          <p:cNvSpPr/>
-          <p:nvPr/>
-        </p:nvSpPr>
-        <p:spPr bwMode="auto">
-          <a:xfrm>
-            <a:off x="7205471" y="5276088"/>
-            <a:ext cx="2194560" cy="365760"/>
-          </a:xfrm>
-          <a:prstGeom prst="rect">
-            <a:avLst/>
-          </a:prstGeom>
-          <a:noFill/>
-          <a:ln/>
-        </p:spPr>
-        <p:txBody>
-          <a:bodyPr wrap="square" lIns="0" tIns="0" rIns="0" bIns="0" rtlCol="0" anchor="ctr"/>
-          <a:lstStyle/>
-          <a:p>
-            <a:pPr marL="0" indent="0">
-              <a:buNone/>
-              <a:defRPr/>
-            </a:pPr>
-            <a:r>
-              <a:rPr lang="en-US" sz="1050">
-                <a:solidFill>
-                  <a:srgbClr val="1E293B"/>
-                </a:solidFill>
-                <a:latin typeface="Calibri"/>
-                <a:ea typeface="Calibri"/>
-                <a:cs typeface="Calibri"/>
-              </a:rPr>
-              <a:t>Fariha Islam</a:t>
-            </a:r>
-            <a:endParaRPr lang="en-US" sz="1050"/>
-          </a:p>
-        </p:txBody>
-      </p:sp>
-      <p:sp>
-        <p:nvSpPr>
-          <p:cNvPr id="1378048309" name="Shape 46"/>
-          <p:cNvSpPr/>
-          <p:nvPr/>
-        </p:nvSpPr>
-        <p:spPr bwMode="auto">
-          <a:xfrm>
-            <a:off x="10195560" y="5330952"/>
-            <a:ext cx="1005840" cy="256032"/>
-          </a:xfrm>
-          <a:prstGeom prst="roundRect">
-            <a:avLst>
-              <a:gd name="adj" fmla="val 50000"/>
-            </a:avLst>
-          </a:prstGeom>
-          <a:solidFill>
-            <a:srgbClr val="F0FDF4"/>
-          </a:solidFill>
-          <a:ln/>
-        </p:spPr>
-      </p:sp>
-      <p:sp>
-        <p:nvSpPr>
-          <p:cNvPr id="1660598449" name="Text 47"/>
-          <p:cNvSpPr/>
-          <p:nvPr/>
-        </p:nvSpPr>
-        <p:spPr bwMode="auto">
-          <a:xfrm>
-            <a:off x="10195560" y="5330952"/>
-            <a:ext cx="1005840" cy="256032"/>
-          </a:xfrm>
-          <a:prstGeom prst="rect">
-            <a:avLst/>
-          </a:prstGeom>
-          <a:noFill/>
-          <a:ln/>
-        </p:spPr>
-        <p:txBody>
-          <a:bodyPr wrap="square" lIns="0" tIns="0" rIns="0" bIns="0" rtlCol="0" anchor="ctr"/>
-          <a:lstStyle/>
-          <a:p>
-            <a:pPr marL="0" indent="0" algn="ctr">
-              <a:buNone/>
-              <a:defRPr/>
-            </a:pPr>
-            <a:r>
-              <a:rPr lang="en-US" sz="900" b="1">
-                <a:solidFill>
-                  <a:srgbClr val="15803D"/>
-                </a:solidFill>
-                <a:latin typeface="Calibri"/>
-                <a:ea typeface="Calibri"/>
-                <a:cs typeface="Calibri"/>
-              </a:rPr>
-              <a:t>Present</a:t>
-            </a:r>
-            <a:endParaRPr lang="en-US" sz="900"/>
-          </a:p>
-        </p:txBody>
-      </p:sp>
-      <p:sp>
-        <p:nvSpPr>
-          <p:cNvPr id="1263348094" name="Text 48"/>
-          <p:cNvSpPr/>
-          <p:nvPr/>
-        </p:nvSpPr>
-        <p:spPr bwMode="auto">
-          <a:xfrm>
-            <a:off x="457200" y="6473952"/>
-            <a:ext cx="5486400" cy="274320"/>
-          </a:xfrm>
-          <a:prstGeom prst="rect">
-            <a:avLst/>
-          </a:prstGeom>
-          <a:noFill/>
-          <a:ln/>
-        </p:spPr>
-        <p:txBody>
-          <a:bodyPr wrap="square" lIns="0" tIns="0" rIns="0" bIns="0" rtlCol="0" anchor="ctr"/>
-          <a:lstStyle/>
-          <a:p>
-            <a:pPr marL="0" indent="0" algn="l">
-              <a:buNone/>
-              <a:defRPr/>
-            </a:pPr>
-            <a:r>
-              <a:rPr lang="en-US" sz="900">
-                <a:solidFill>
-                  <a:srgbClr val="64748B"/>
-                </a:solidFill>
-                <a:latin typeface="Calibri"/>
-                <a:ea typeface="Calibri"/>
-                <a:cs typeface="Calibri"/>
-              </a:rPr>
-              <a:t>MarkIt  ·  Our Solution</a:t>
-            </a:r>
-            <a:endParaRPr lang="en-US" sz="900"/>
-          </a:p>
-        </p:txBody>
-      </p:sp>
-      <p:sp>
-        <p:nvSpPr>
-          <p:cNvPr id="430992839" name="Text 49"/>
-          <p:cNvSpPr/>
-          <p:nvPr/>
-        </p:nvSpPr>
-        <p:spPr bwMode="auto">
-          <a:xfrm>
-            <a:off x="11277295" y="6473952"/>
-            <a:ext cx="457200" cy="274320"/>
-          </a:xfrm>
-          <a:prstGeom prst="rect">
-            <a:avLst/>
-          </a:prstGeom>
-          <a:noFill/>
-          <a:ln/>
-        </p:spPr>
-        <p:txBody>
-          <a:bodyPr wrap="square" lIns="0" tIns="0" rIns="0" bIns="0" rtlCol="0" anchor="ctr"/>
-          <a:lstStyle/>
-          <a:p>
-            <a:pPr marL="0" indent="0" algn="r">
-              <a:buNone/>
-              <a:defRPr/>
-            </a:pPr>
-            <a:r>
-              <a:rPr lang="en-US" sz="900">
-                <a:solidFill>
-                  <a:srgbClr val="64748B"/>
-                </a:solidFill>
-                <a:latin typeface="Calibri"/>
-                <a:ea typeface="Calibri"/>
-                <a:cs typeface="Calibri"/>
-              </a:rPr>
-              <a:t>4</a:t>
-            </a:r>
-            <a:endParaRPr lang="en-US" sz="900"/>
-          </a:p>
-        </p:txBody>
-      </p:sp>
+      <p:pic>
+        <p:nvPicPr>
+          <p:cNvPr id="1927038695" name=""/>
+          <p:cNvPicPr>
+            <a:picLocks noChangeAspect="1"/>
+          </p:cNvPicPr>
+          <p:nvPr/>
+        </p:nvPicPr>
+        <p:blipFill rotWithShape="1">
+          <a:blip r:embed="rId7"/>
+          <a:srcRect l="0" t="0" r="0" b="14948"/>
+          <a:stretch/>
+        </p:blipFill>
+        <p:spPr bwMode="auto">
+          <a:xfrm flipH="0" flipV="0">
+            <a:off x="6492240" y="2315183"/>
+            <a:ext cx="5135786" cy="3637323"/>
+          </a:xfrm>
+          <a:prstGeom prst="rect">
+            <a:avLst/>
+          </a:prstGeom>
+        </p:spPr>
+      </p:pic>
     </p:spTree>
   </p:cSld>
   <p:clrMapOvr>
@@ -12091,7 +11171,7 @@
       </p:grpSpPr>
       <p:sp>
         <p:nvSpPr>
-          <p:cNvPr id="390266511" name="Text 0"/>
+          <p:cNvPr id="451702161" name="Text 0"/>
           <p:cNvSpPr/>
           <p:nvPr/>
         </p:nvSpPr>
@@ -12131,7 +11211,7 @@
       </p:sp>
       <p:sp>
         <p:nvSpPr>
-          <p:cNvPr id="1583103161" name="Text 1"/>
+          <p:cNvPr id="1190287764" name="Text 1"/>
           <p:cNvSpPr/>
           <p:nvPr/>
         </p:nvSpPr>
@@ -12171,7 +11251,7 @@
       </p:sp>
       <p:sp>
         <p:nvSpPr>
-          <p:cNvPr id="1805657720" name="Text 2"/>
+          <p:cNvPr id="2118585610" name="Text 2"/>
           <p:cNvSpPr/>
           <p:nvPr/>
         </p:nvSpPr>
@@ -12211,7 +11291,7 @@
       </p:sp>
       <p:sp>
         <p:nvSpPr>
-          <p:cNvPr id="152497720" name="Shape 3"/>
+          <p:cNvPr id="267209059" name="Shape 3"/>
           <p:cNvSpPr/>
           <p:nvPr/>
         </p:nvSpPr>
@@ -12238,7 +11318,7 @@
       </p:sp>
       <p:pic>
         <p:nvPicPr>
-          <p:cNvPr id="999174953" name="Image 0" descr="preencoded.png"/>
+          <p:cNvPr id="385231353" name="Image 0" descr="preencoded.png"/>
           <p:cNvPicPr>
             <a:picLocks noChangeAspect="1"/>
           </p:cNvPicPr>
@@ -12260,7 +11340,7 @@
       </p:pic>
       <p:sp>
         <p:nvSpPr>
-          <p:cNvPr id="628433009" name="Text 4"/>
+          <p:cNvPr id="1388026623" name="Text 4"/>
           <p:cNvSpPr/>
           <p:nvPr/>
         </p:nvSpPr>
@@ -12300,7 +11380,7 @@
       </p:sp>
       <p:sp>
         <p:nvSpPr>
-          <p:cNvPr id="1120794662" name="Shape 5"/>
+          <p:cNvPr id="1647128313" name="Shape 5"/>
           <p:cNvSpPr/>
           <p:nvPr/>
         </p:nvSpPr>
@@ -12320,7 +11400,7 @@
       </p:sp>
       <p:sp>
         <p:nvSpPr>
-          <p:cNvPr id="1538123021" name="Text 6"/>
+          <p:cNvPr id="155293712" name="Text 6"/>
           <p:cNvSpPr/>
           <p:nvPr/>
         </p:nvSpPr>
@@ -12360,7 +11440,7 @@
       </p:sp>
       <p:sp>
         <p:nvSpPr>
-          <p:cNvPr id="2124360800" name="Shape 7"/>
+          <p:cNvPr id="844604947" name="Shape 7"/>
           <p:cNvSpPr/>
           <p:nvPr/>
         </p:nvSpPr>
@@ -12380,7 +11460,7 @@
       </p:sp>
       <p:sp>
         <p:nvSpPr>
-          <p:cNvPr id="375026708" name="Text 8"/>
+          <p:cNvPr id="593603699" name="Text 8"/>
           <p:cNvSpPr/>
           <p:nvPr/>
         </p:nvSpPr>
@@ -12420,7 +11500,7 @@
       </p:sp>
       <p:sp>
         <p:nvSpPr>
-          <p:cNvPr id="626091501" name="Shape 9"/>
+          <p:cNvPr id="1816161708" name="Shape 9"/>
           <p:cNvSpPr/>
           <p:nvPr/>
         </p:nvSpPr>
@@ -12440,7 +11520,7 @@
       </p:sp>
       <p:sp>
         <p:nvSpPr>
-          <p:cNvPr id="903162794" name="Text 10"/>
+          <p:cNvPr id="1829620662" name="Text 10"/>
           <p:cNvSpPr/>
           <p:nvPr/>
         </p:nvSpPr>
@@ -12480,7 +11560,7 @@
       </p:sp>
       <p:sp>
         <p:nvSpPr>
-          <p:cNvPr id="675218593" name="Shape 11"/>
+          <p:cNvPr id="1606925653" name="Shape 11"/>
           <p:cNvSpPr/>
           <p:nvPr/>
         </p:nvSpPr>
@@ -12500,7 +11580,7 @@
       </p:sp>
       <p:sp>
         <p:nvSpPr>
-          <p:cNvPr id="1096465489" name="Text 12"/>
+          <p:cNvPr id="1478668159" name="Text 12"/>
           <p:cNvSpPr/>
           <p:nvPr/>
         </p:nvSpPr>
@@ -12540,7 +11620,7 @@
       </p:sp>
       <p:sp>
         <p:nvSpPr>
-          <p:cNvPr id="951998187" name="Shape 13"/>
+          <p:cNvPr id="2116826899" name="Shape 13"/>
           <p:cNvSpPr/>
           <p:nvPr/>
         </p:nvSpPr>
@@ -12560,7 +11640,7 @@
       </p:sp>
       <p:sp>
         <p:nvSpPr>
-          <p:cNvPr id="920314211" name="Text 14"/>
+          <p:cNvPr id="605253002" name="Text 14"/>
           <p:cNvSpPr/>
           <p:nvPr/>
         </p:nvSpPr>
@@ -12600,7 +11680,7 @@
       </p:sp>
       <p:sp>
         <p:nvSpPr>
-          <p:cNvPr id="1984895626" name="Shape 15"/>
+          <p:cNvPr id="743914007" name="Shape 15"/>
           <p:cNvSpPr/>
           <p:nvPr/>
         </p:nvSpPr>
@@ -12620,7 +11700,7 @@
       </p:sp>
       <p:sp>
         <p:nvSpPr>
-          <p:cNvPr id="55271366" name="Text 16"/>
+          <p:cNvPr id="427451113" name="Text 16"/>
           <p:cNvSpPr/>
           <p:nvPr/>
         </p:nvSpPr>
@@ -12660,7 +11740,7 @@
       </p:sp>
       <p:sp>
         <p:nvSpPr>
-          <p:cNvPr id="1849625876" name="Shape 17"/>
+          <p:cNvPr id="17466237" name="Shape 17"/>
           <p:cNvSpPr/>
           <p:nvPr/>
         </p:nvSpPr>
@@ -12687,7 +11767,7 @@
       </p:sp>
       <p:pic>
         <p:nvPicPr>
-          <p:cNvPr id="508417491" name="Image 1" descr="preencoded.png"/>
+          <p:cNvPr id="873278626" name="Image 1" descr="preencoded.png"/>
           <p:cNvPicPr>
             <a:picLocks noChangeAspect="1"/>
           </p:cNvPicPr>
@@ -12709,7 +11789,7 @@
       </p:pic>
       <p:sp>
         <p:nvSpPr>
-          <p:cNvPr id="969906094" name="Text 18"/>
+          <p:cNvPr id="69638901" name="Text 18"/>
           <p:cNvSpPr/>
           <p:nvPr/>
         </p:nvSpPr>
@@ -12749,7 +11829,7 @@
       </p:sp>
       <p:sp>
         <p:nvSpPr>
-          <p:cNvPr id="336713469" name="Shape 19"/>
+          <p:cNvPr id="1164317215" name="Shape 19"/>
           <p:cNvSpPr/>
           <p:nvPr/>
         </p:nvSpPr>
@@ -12769,7 +11849,7 @@
       </p:sp>
       <p:sp>
         <p:nvSpPr>
-          <p:cNvPr id="1034483455" name="Text 20"/>
+          <p:cNvPr id="1896753319" name="Text 20"/>
           <p:cNvSpPr/>
           <p:nvPr/>
         </p:nvSpPr>
@@ -12809,7 +11889,7 @@
       </p:sp>
       <p:sp>
         <p:nvSpPr>
-          <p:cNvPr id="1278727572" name="Shape 21"/>
+          <p:cNvPr id="698767776" name="Shape 21"/>
           <p:cNvSpPr/>
           <p:nvPr/>
         </p:nvSpPr>
@@ -12829,7 +11909,7 @@
       </p:sp>
       <p:sp>
         <p:nvSpPr>
-          <p:cNvPr id="561561343" name="Text 22"/>
+          <p:cNvPr id="812849180" name="Text 22"/>
           <p:cNvSpPr/>
           <p:nvPr/>
         </p:nvSpPr>
@@ -12869,7 +11949,7 @@
       </p:sp>
       <p:sp>
         <p:nvSpPr>
-          <p:cNvPr id="1393353833" name="Shape 23"/>
+          <p:cNvPr id="216951399" name="Shape 23"/>
           <p:cNvSpPr/>
           <p:nvPr/>
         </p:nvSpPr>
@@ -12889,7 +11969,7 @@
       </p:sp>
       <p:sp>
         <p:nvSpPr>
-          <p:cNvPr id="463914889" name="Text 24"/>
+          <p:cNvPr id="1558676908" name="Text 24"/>
           <p:cNvSpPr/>
           <p:nvPr/>
         </p:nvSpPr>
@@ -12929,7 +12009,7 @@
       </p:sp>
       <p:sp>
         <p:nvSpPr>
-          <p:cNvPr id="1954291968" name="Shape 25"/>
+          <p:cNvPr id="546951146" name="Shape 25"/>
           <p:cNvSpPr/>
           <p:nvPr/>
         </p:nvSpPr>
@@ -12949,7 +12029,7 @@
       </p:sp>
       <p:sp>
         <p:nvSpPr>
-          <p:cNvPr id="1970467148" name="Text 26"/>
+          <p:cNvPr id="1753537761" name="Text 26"/>
           <p:cNvSpPr/>
           <p:nvPr/>
         </p:nvSpPr>
@@ -12989,7 +12069,7 @@
       </p:sp>
       <p:sp>
         <p:nvSpPr>
-          <p:cNvPr id="1204337022" name="Shape 27"/>
+          <p:cNvPr id="99023292" name="Shape 27"/>
           <p:cNvSpPr/>
           <p:nvPr/>
         </p:nvSpPr>
@@ -13016,7 +12096,7 @@
       </p:sp>
       <p:pic>
         <p:nvPicPr>
-          <p:cNvPr id="1204857413" name="Image 2" descr="preencoded.png"/>
+          <p:cNvPr id="214935872" name="Image 2" descr="preencoded.png"/>
           <p:cNvPicPr>
             <a:picLocks noChangeAspect="1"/>
           </p:cNvPicPr>
@@ -13038,7 +12118,7 @@
       </p:pic>
       <p:sp>
         <p:nvSpPr>
-          <p:cNvPr id="1521297843" name="Text 28"/>
+          <p:cNvPr id="465156086" name="Text 28"/>
           <p:cNvSpPr/>
           <p:nvPr/>
         </p:nvSpPr>
@@ -13078,7 +12158,7 @@
       </p:sp>
       <p:sp>
         <p:nvSpPr>
-          <p:cNvPr id="1261592790" name="Shape 29"/>
+          <p:cNvPr id="736212696" name="Shape 29"/>
           <p:cNvSpPr/>
           <p:nvPr/>
         </p:nvSpPr>
@@ -13098,7 +12178,7 @@
       </p:sp>
       <p:sp>
         <p:nvSpPr>
-          <p:cNvPr id="1789538356" name="Text 30"/>
+          <p:cNvPr id="1368432513" name="Text 30"/>
           <p:cNvSpPr/>
           <p:nvPr/>
         </p:nvSpPr>
@@ -13138,7 +12218,7 @@
       </p:sp>
       <p:sp>
         <p:nvSpPr>
-          <p:cNvPr id="72915363" name="Shape 31"/>
+          <p:cNvPr id="1380430752" name="Shape 31"/>
           <p:cNvSpPr/>
           <p:nvPr/>
         </p:nvSpPr>
@@ -13158,7 +12238,7 @@
       </p:sp>
       <p:sp>
         <p:nvSpPr>
-          <p:cNvPr id="1755093700" name="Text 32"/>
+          <p:cNvPr id="1262738903" name="Text 32"/>
           <p:cNvSpPr/>
           <p:nvPr/>
         </p:nvSpPr>
@@ -13198,7 +12278,7 @@
       </p:sp>
       <p:sp>
         <p:nvSpPr>
-          <p:cNvPr id="589000784" name="Shape 33"/>
+          <p:cNvPr id="2114549996" name="Shape 33"/>
           <p:cNvSpPr/>
           <p:nvPr/>
         </p:nvSpPr>
@@ -13218,7 +12298,7 @@
       </p:sp>
       <p:sp>
         <p:nvSpPr>
-          <p:cNvPr id="863614343" name="Text 34"/>
+          <p:cNvPr id="1284426129" name="Text 34"/>
           <p:cNvSpPr/>
           <p:nvPr/>
         </p:nvSpPr>
@@ -13258,7 +12338,7 @@
       </p:sp>
       <p:sp>
         <p:nvSpPr>
-          <p:cNvPr id="1089504143" name="Text 35"/>
+          <p:cNvPr id="1612292026" name="Text 35"/>
           <p:cNvSpPr/>
           <p:nvPr/>
         </p:nvSpPr>
@@ -13298,7 +12378,7 @@
       </p:sp>
       <p:sp>
         <p:nvSpPr>
-          <p:cNvPr id="1554479588" name="Text 36"/>
+          <p:cNvPr id="1112785362" name="Text 36"/>
           <p:cNvSpPr/>
           <p:nvPr/>
         </p:nvSpPr>
@@ -13378,7 +12458,7 @@
       </p:grpSpPr>
       <p:sp>
         <p:nvSpPr>
-          <p:cNvPr id="380052890" name="Text 0"/>
+          <p:cNvPr id="222261778" name="Text 0"/>
           <p:cNvSpPr/>
           <p:nvPr/>
         </p:nvSpPr>
@@ -13418,7 +12498,7 @@
       </p:sp>
       <p:sp>
         <p:nvSpPr>
-          <p:cNvPr id="1499268225" name="Text 1"/>
+          <p:cNvPr id="1023190978" name="Text 1"/>
           <p:cNvSpPr/>
           <p:nvPr/>
         </p:nvSpPr>
@@ -13458,7 +12538,7 @@
       </p:sp>
       <p:sp>
         <p:nvSpPr>
-          <p:cNvPr id="410658087" name="Text 2"/>
+          <p:cNvPr id="624128371" name="Text 2"/>
           <p:cNvSpPr/>
           <p:nvPr/>
         </p:nvSpPr>
@@ -13498,7 +12578,7 @@
       </p:sp>
       <p:sp>
         <p:nvSpPr>
-          <p:cNvPr id="810405000" name="Shape 3"/>
+          <p:cNvPr id="1242920565" name="Shape 3"/>
           <p:cNvSpPr/>
           <p:nvPr/>
         </p:nvSpPr>
@@ -13520,7 +12600,7 @@
       </p:sp>
       <p:pic>
         <p:nvPicPr>
-          <p:cNvPr id="1649615490" name="Image 0" descr="preencoded.png"/>
+          <p:cNvPr id="1504590416" name="Image 0" descr="preencoded.png"/>
           <p:cNvPicPr>
             <a:picLocks noChangeAspect="1"/>
           </p:cNvPicPr>
@@ -13542,7 +12622,7 @@
       </p:pic>
       <p:sp>
         <p:nvSpPr>
-          <p:cNvPr id="1628512731" name="Text 4"/>
+          <p:cNvPr id="1203917700" name="Text 4"/>
           <p:cNvSpPr/>
           <p:nvPr/>
         </p:nvSpPr>
@@ -13582,7 +12662,7 @@
       </p:sp>
       <p:sp>
         <p:nvSpPr>
-          <p:cNvPr id="1654793692" name="Text 5"/>
+          <p:cNvPr id="915652663" name="Text 5"/>
           <p:cNvSpPr/>
           <p:nvPr/>
         </p:nvSpPr>
@@ -13622,7 +12702,7 @@
       </p:sp>
       <p:sp>
         <p:nvSpPr>
-          <p:cNvPr id="910618578" name="Shape 6"/>
+          <p:cNvPr id="1214413839" name="Shape 6"/>
           <p:cNvSpPr/>
           <p:nvPr/>
         </p:nvSpPr>
@@ -13644,7 +12724,7 @@
       </p:sp>
       <p:pic>
         <p:nvPicPr>
-          <p:cNvPr id="945417751" name="Image 1" descr="preencoded.png"/>
+          <p:cNvPr id="1624708495" name="Image 1" descr="preencoded.png"/>
           <p:cNvPicPr>
             <a:picLocks noChangeAspect="1"/>
           </p:cNvPicPr>
@@ -13666,7 +12746,7 @@
       </p:pic>
       <p:sp>
         <p:nvSpPr>
-          <p:cNvPr id="1804481287" name="Text 7"/>
+          <p:cNvPr id="1024214711" name="Text 7"/>
           <p:cNvSpPr/>
           <p:nvPr/>
         </p:nvSpPr>
@@ -13706,7 +12786,7 @@
       </p:sp>
       <p:sp>
         <p:nvSpPr>
-          <p:cNvPr id="1128799465" name="Text 8"/>
+          <p:cNvPr id="1164618316" name="Text 8"/>
           <p:cNvSpPr/>
           <p:nvPr/>
         </p:nvSpPr>
@@ -13746,7 +12826,7 @@
       </p:sp>
       <p:sp>
         <p:nvSpPr>
-          <p:cNvPr id="1955422856" name="Shape 9"/>
+          <p:cNvPr id="815466142" name="Shape 9"/>
           <p:cNvSpPr/>
           <p:nvPr/>
         </p:nvSpPr>
@@ -13768,7 +12848,7 @@
       </p:sp>
       <p:pic>
         <p:nvPicPr>
-          <p:cNvPr id="1714911883" name="Image 2" descr="preencoded.png"/>
+          <p:cNvPr id="1886280100" name="Image 2" descr="preencoded.png"/>
           <p:cNvPicPr>
             <a:picLocks noChangeAspect="1"/>
           </p:cNvPicPr>
@@ -13790,7 +12870,7 @@
       </p:pic>
       <p:sp>
         <p:nvSpPr>
-          <p:cNvPr id="1597392406" name="Text 10"/>
+          <p:cNvPr id="1673353126" name="Text 10"/>
           <p:cNvSpPr/>
           <p:nvPr/>
         </p:nvSpPr>
@@ -13830,7 +12910,7 @@
       </p:sp>
       <p:sp>
         <p:nvSpPr>
-          <p:cNvPr id="2144232211" name="Text 11"/>
+          <p:cNvPr id="1333343590" name="Text 11"/>
           <p:cNvSpPr/>
           <p:nvPr/>
         </p:nvSpPr>
@@ -13870,7 +12950,7 @@
       </p:sp>
       <p:pic>
         <p:nvPicPr>
-          <p:cNvPr id="1585629963" name="Image 3" descr="preencoded.png"/>
+          <p:cNvPr id="620689517" name="Image 3" descr="preencoded.png"/>
           <p:cNvPicPr>
             <a:picLocks noChangeAspect="1"/>
           </p:cNvPicPr>
@@ -13892,7 +12972,7 @@
       </p:pic>
       <p:sp>
         <p:nvSpPr>
-          <p:cNvPr id="144913988" name="Shape 12"/>
+          <p:cNvPr id="387598650" name="Shape 12"/>
           <p:cNvSpPr/>
           <p:nvPr/>
         </p:nvSpPr>
@@ -13919,7 +12999,7 @@
       </p:sp>
       <p:sp>
         <p:nvSpPr>
-          <p:cNvPr id="1022673160" name="Text 13"/>
+          <p:cNvPr id="1048295147" name="Text 13"/>
           <p:cNvSpPr/>
           <p:nvPr/>
         </p:nvSpPr>
@@ -13959,7 +13039,7 @@
       </p:sp>
       <p:sp>
         <p:nvSpPr>
-          <p:cNvPr id="990973612" name="Shape 14"/>
+          <p:cNvPr id="1174148033" name="Shape 14"/>
           <p:cNvSpPr/>
           <p:nvPr/>
         </p:nvSpPr>
@@ -13986,7 +13066,7 @@
       </p:sp>
       <p:sp>
         <p:nvSpPr>
-          <p:cNvPr id="1235190488" name="Text 15"/>
+          <p:cNvPr id="1616403807" name="Text 15"/>
           <p:cNvSpPr/>
           <p:nvPr/>
         </p:nvSpPr>
@@ -14026,7 +13106,7 @@
       </p:sp>
       <p:sp>
         <p:nvSpPr>
-          <p:cNvPr id="1153617842" name="Shape 16"/>
+          <p:cNvPr id="57995661" name="Shape 16"/>
           <p:cNvSpPr/>
           <p:nvPr/>
         </p:nvSpPr>
@@ -14053,7 +13133,7 @@
       </p:sp>
       <p:sp>
         <p:nvSpPr>
-          <p:cNvPr id="1408086691" name="Text 17"/>
+          <p:cNvPr id="346182067" name="Text 17"/>
           <p:cNvSpPr/>
           <p:nvPr/>
         </p:nvSpPr>
@@ -14093,7 +13173,7 @@
       </p:sp>
       <p:sp>
         <p:nvSpPr>
-          <p:cNvPr id="1300033421" name="Shape 18"/>
+          <p:cNvPr id="33461379" name="Shape 18"/>
           <p:cNvSpPr/>
           <p:nvPr/>
         </p:nvSpPr>
@@ -14120,7 +13200,7 @@
       </p:sp>
       <p:sp>
         <p:nvSpPr>
-          <p:cNvPr id="1571090203" name="Text 19"/>
+          <p:cNvPr id="282360892" name="Text 19"/>
           <p:cNvSpPr/>
           <p:nvPr/>
         </p:nvSpPr>
@@ -14160,7 +13240,7 @@
       </p:sp>
       <p:sp>
         <p:nvSpPr>
-          <p:cNvPr id="1210029009" name="Shape 20"/>
+          <p:cNvPr id="967643175" name="Shape 20"/>
           <p:cNvSpPr/>
           <p:nvPr/>
         </p:nvSpPr>
@@ -14187,7 +13267,7 @@
       </p:sp>
       <p:sp>
         <p:nvSpPr>
-          <p:cNvPr id="338501582" name="Text 21"/>
+          <p:cNvPr id="1194325899" name="Text 21"/>
           <p:cNvSpPr/>
           <p:nvPr/>
         </p:nvSpPr>
@@ -14227,7 +13307,7 @@
       </p:sp>
       <p:sp>
         <p:nvSpPr>
-          <p:cNvPr id="1231102695" name="Shape 22"/>
+          <p:cNvPr id="1516762036" name="Shape 22"/>
           <p:cNvSpPr/>
           <p:nvPr/>
         </p:nvSpPr>
@@ -14254,7 +13334,7 @@
       </p:sp>
       <p:sp>
         <p:nvSpPr>
-          <p:cNvPr id="1986993890" name="Text 23"/>
+          <p:cNvPr id="266445593" name="Text 23"/>
           <p:cNvSpPr/>
           <p:nvPr/>
         </p:nvSpPr>
@@ -14294,7 +13374,7 @@
       </p:sp>
       <p:sp>
         <p:nvSpPr>
-          <p:cNvPr id="310627371" name="Shape 24"/>
+          <p:cNvPr id="84897675" name="Shape 24"/>
           <p:cNvSpPr/>
           <p:nvPr/>
         </p:nvSpPr>
@@ -14321,7 +13401,7 @@
       </p:sp>
       <p:sp>
         <p:nvSpPr>
-          <p:cNvPr id="1591261401" name="Text 25"/>
+          <p:cNvPr id="1121528240" name="Text 25"/>
           <p:cNvSpPr/>
           <p:nvPr/>
         </p:nvSpPr>
@@ -14361,7 +13441,7 @@
       </p:sp>
       <p:sp>
         <p:nvSpPr>
-          <p:cNvPr id="1100731087" name="Shape 26"/>
+          <p:cNvPr id="961160743" name="Shape 26"/>
           <p:cNvSpPr/>
           <p:nvPr/>
         </p:nvSpPr>
@@ -14388,7 +13468,7 @@
       </p:sp>
       <p:sp>
         <p:nvSpPr>
-          <p:cNvPr id="1188121145" name="Text 27"/>
+          <p:cNvPr id="518877639" name="Text 27"/>
           <p:cNvSpPr/>
           <p:nvPr/>
         </p:nvSpPr>
@@ -14428,7 +13508,7 @@
       </p:sp>
       <p:sp>
         <p:nvSpPr>
-          <p:cNvPr id="208691271" name="Shape 28"/>
+          <p:cNvPr id="750018944" name="Shape 28"/>
           <p:cNvSpPr/>
           <p:nvPr/>
         </p:nvSpPr>
@@ -14455,7 +13535,7 @@
       </p:sp>
       <p:sp>
         <p:nvSpPr>
-          <p:cNvPr id="1305641134" name="Text 29"/>
+          <p:cNvPr id="419335368" name="Text 29"/>
           <p:cNvSpPr/>
           <p:nvPr/>
         </p:nvSpPr>
@@ -14495,7 +13575,7 @@
       </p:sp>
       <p:sp>
         <p:nvSpPr>
-          <p:cNvPr id="779799812" name="Shape 30"/>
+          <p:cNvPr id="477287372" name="Shape 30"/>
           <p:cNvSpPr/>
           <p:nvPr/>
         </p:nvSpPr>
@@ -14522,7 +13602,7 @@
       </p:sp>
       <p:sp>
         <p:nvSpPr>
-          <p:cNvPr id="1002831222" name="Text 31"/>
+          <p:cNvPr id="474864728" name="Text 31"/>
           <p:cNvSpPr/>
           <p:nvPr/>
         </p:nvSpPr>
@@ -14562,7 +13642,7 @@
       </p:sp>
       <p:sp>
         <p:nvSpPr>
-          <p:cNvPr id="617954948" name="Shape 32"/>
+          <p:cNvPr id="1609929766" name="Shape 32"/>
           <p:cNvSpPr/>
           <p:nvPr/>
         </p:nvSpPr>
@@ -14589,7 +13669,7 @@
       </p:sp>
       <p:sp>
         <p:nvSpPr>
-          <p:cNvPr id="323187199" name="Text 33"/>
+          <p:cNvPr id="700943383" name="Text 33"/>
           <p:cNvSpPr/>
           <p:nvPr/>
         </p:nvSpPr>
@@ -14629,7 +13709,7 @@
       </p:sp>
       <p:sp>
         <p:nvSpPr>
-          <p:cNvPr id="1183464658" name="Shape 34"/>
+          <p:cNvPr id="393733659" name="Shape 34"/>
           <p:cNvSpPr/>
           <p:nvPr/>
         </p:nvSpPr>
@@ -14656,7 +13736,7 @@
       </p:sp>
       <p:sp>
         <p:nvSpPr>
-          <p:cNvPr id="550425074" name="Text 35"/>
+          <p:cNvPr id="2047138768" name="Text 35"/>
           <p:cNvSpPr/>
           <p:nvPr/>
         </p:nvSpPr>
@@ -14696,7 +13776,7 @@
       </p:sp>
       <p:sp>
         <p:nvSpPr>
-          <p:cNvPr id="1585121599" name="Shape 36"/>
+          <p:cNvPr id="2145952369" name="Shape 36"/>
           <p:cNvSpPr/>
           <p:nvPr/>
         </p:nvSpPr>
@@ -14723,7 +13803,7 @@
       </p:sp>
       <p:sp>
         <p:nvSpPr>
-          <p:cNvPr id="1379621515" name="Text 37"/>
+          <p:cNvPr id="209881337" name="Text 37"/>
           <p:cNvSpPr/>
           <p:nvPr/>
         </p:nvSpPr>
@@ -14763,7 +13843,7 @@
       </p:sp>
       <p:sp>
         <p:nvSpPr>
-          <p:cNvPr id="608747833" name="Shape 38"/>
+          <p:cNvPr id="1599274136" name="Shape 38"/>
           <p:cNvSpPr/>
           <p:nvPr/>
         </p:nvSpPr>
@@ -14790,7 +13870,7 @@
       </p:sp>
       <p:sp>
         <p:nvSpPr>
-          <p:cNvPr id="1012022589" name="Text 39"/>
+          <p:cNvPr id="1643475587" name="Text 39"/>
           <p:cNvSpPr/>
           <p:nvPr/>
         </p:nvSpPr>
@@ -14830,7 +13910,7 @@
       </p:sp>
       <p:sp>
         <p:nvSpPr>
-          <p:cNvPr id="1708294665" name="Shape 40"/>
+          <p:cNvPr id="1813143068" name="Shape 40"/>
           <p:cNvSpPr/>
           <p:nvPr/>
         </p:nvSpPr>
@@ -14857,7 +13937,7 @@
       </p:sp>
       <p:sp>
         <p:nvSpPr>
-          <p:cNvPr id="1832470697" name="Text 41"/>
+          <p:cNvPr id="1115798163" name="Text 41"/>
           <p:cNvSpPr/>
           <p:nvPr/>
         </p:nvSpPr>
@@ -14897,7 +13977,7 @@
       </p:sp>
       <p:sp>
         <p:nvSpPr>
-          <p:cNvPr id="899260328" name="Text 42"/>
+          <p:cNvPr id="677823123" name="Text 42"/>
           <p:cNvSpPr/>
           <p:nvPr/>
         </p:nvSpPr>
@@ -14937,7 +14017,7 @@
       </p:sp>
       <p:sp>
         <p:nvSpPr>
-          <p:cNvPr id="1660912739" name="Text 43"/>
+          <p:cNvPr id="1872805641" name="Text 43"/>
           <p:cNvSpPr/>
           <p:nvPr/>
         </p:nvSpPr>
@@ -14977,7 +14057,7 @@
       </p:sp>
       <p:pic>
         <p:nvPicPr>
-          <p:cNvPr id="1564899990" name="Image 3" descr="preencoded.png"/>
+          <p:cNvPr id="776679247" name="Image 3" descr="preencoded.png"/>
           <p:cNvPicPr>
             <a:picLocks noChangeAspect="1"/>
           </p:cNvPicPr>
@@ -15039,7 +14119,7 @@
       </p:grpSpPr>
       <p:sp>
         <p:nvSpPr>
-          <p:cNvPr id="1452845099" name="Text 0"/>
+          <p:cNvPr id="1778656564" name="Text 0"/>
           <p:cNvSpPr/>
           <p:nvPr/>
         </p:nvSpPr>
@@ -15083,7 +14163,7 @@
       </p:sp>
       <p:sp>
         <p:nvSpPr>
-          <p:cNvPr id="155256835" name="Text 1"/>
+          <p:cNvPr id="2086971181" name="Text 1"/>
           <p:cNvSpPr/>
           <p:nvPr/>
         </p:nvSpPr>
@@ -15138,7 +14218,7 @@
       </p:sp>
       <p:sp>
         <p:nvSpPr>
-          <p:cNvPr id="1291513743" name="Text 2"/>
+          <p:cNvPr id="483248436" name="Text 2"/>
           <p:cNvSpPr/>
           <p:nvPr/>
         </p:nvSpPr>
@@ -15182,7 +14262,7 @@
       </p:sp>
       <p:sp>
         <p:nvSpPr>
-          <p:cNvPr id="976090287" name="Shape 3"/>
+          <p:cNvPr id="1418025425" name="Shape 3"/>
           <p:cNvSpPr/>
           <p:nvPr/>
         </p:nvSpPr>
@@ -15226,7 +14306,7 @@
       </p:sp>
       <p:pic>
         <p:nvPicPr>
-          <p:cNvPr id="794107290" name="Image 1" descr="preencoded.png"/>
+          <p:cNvPr id="1415262905" name="Image 1" descr="preencoded.png"/>
           <p:cNvPicPr>
             <a:picLocks noChangeAspect="1"/>
           </p:cNvPicPr>
@@ -15248,7 +14328,7 @@
       </p:pic>
       <p:sp>
         <p:nvSpPr>
-          <p:cNvPr id="1310456429" name="Text 4"/>
+          <p:cNvPr id="443758733" name="Text 4"/>
           <p:cNvSpPr/>
           <p:nvPr/>
         </p:nvSpPr>
@@ -15292,7 +14372,7 @@
       </p:sp>
       <p:sp>
         <p:nvSpPr>
-          <p:cNvPr id="531964748" name="Text 5"/>
+          <p:cNvPr id="2146644157" name="Text 5"/>
           <p:cNvSpPr/>
           <p:nvPr/>
         </p:nvSpPr>
@@ -15336,7 +14416,7 @@
       </p:sp>
       <p:pic>
         <p:nvPicPr>
-          <p:cNvPr id="1745305350" name="Image 2" descr="preencoded.png"/>
+          <p:cNvPr id="692616377" name="Image 2" descr="preencoded.png"/>
           <p:cNvPicPr>
             <a:picLocks noChangeAspect="1"/>
           </p:cNvPicPr>
@@ -15358,7 +14438,7 @@
       </p:pic>
       <p:sp>
         <p:nvSpPr>
-          <p:cNvPr id="266525177" name="Shape 6"/>
+          <p:cNvPr id="971743094" name="Shape 6"/>
           <p:cNvSpPr/>
           <p:nvPr/>
         </p:nvSpPr>
@@ -15402,7 +14482,7 @@
       </p:sp>
       <p:pic>
         <p:nvPicPr>
-          <p:cNvPr id="490123448" name="Image 3" descr="preencoded.png"/>
+          <p:cNvPr id="1641865341" name="Image 3" descr="preencoded.png"/>
           <p:cNvPicPr>
             <a:picLocks noChangeAspect="1"/>
           </p:cNvPicPr>
@@ -15424,7 +14504,7 @@
       </p:pic>
       <p:sp>
         <p:nvSpPr>
-          <p:cNvPr id="898301815" name="Text 7"/>
+          <p:cNvPr id="878814204" name="Text 7"/>
           <p:cNvSpPr/>
           <p:nvPr/>
         </p:nvSpPr>
@@ -15468,7 +14548,7 @@
       </p:sp>
       <p:sp>
         <p:nvSpPr>
-          <p:cNvPr id="714623451" name="Text 8"/>
+          <p:cNvPr id="1177258894" name="Text 8"/>
           <p:cNvSpPr/>
           <p:nvPr/>
         </p:nvSpPr>
@@ -15512,7 +14592,7 @@
       </p:sp>
       <p:pic>
         <p:nvPicPr>
-          <p:cNvPr id="2120557879" name="Image 4" descr="preencoded.png"/>
+          <p:cNvPr id="1325267776" name="Image 4" descr="preencoded.png"/>
           <p:cNvPicPr>
             <a:picLocks noChangeAspect="1"/>
           </p:cNvPicPr>
@@ -15534,7 +14614,7 @@
       </p:pic>
       <p:sp>
         <p:nvSpPr>
-          <p:cNvPr id="255447460" name="Shape 9"/>
+          <p:cNvPr id="1700695077" name="Shape 9"/>
           <p:cNvSpPr/>
           <p:nvPr/>
         </p:nvSpPr>
@@ -15578,7 +14658,7 @@
       </p:sp>
       <p:pic>
         <p:nvPicPr>
-          <p:cNvPr id="22509725" name="Image 5" descr="preencoded.png"/>
+          <p:cNvPr id="1226928226" name="Image 5" descr="preencoded.png"/>
           <p:cNvPicPr>
             <a:picLocks noChangeAspect="1"/>
           </p:cNvPicPr>
@@ -15600,7 +14680,7 @@
       </p:pic>
       <p:sp>
         <p:nvSpPr>
-          <p:cNvPr id="1463843345" name="Text 10"/>
+          <p:cNvPr id="1017707716" name="Text 10"/>
           <p:cNvSpPr/>
           <p:nvPr/>
         </p:nvSpPr>
@@ -15644,7 +14724,7 @@
       </p:sp>
       <p:sp>
         <p:nvSpPr>
-          <p:cNvPr id="2063913392" name="Text 11"/>
+          <p:cNvPr id="247274484" name="Text 11"/>
           <p:cNvSpPr/>
           <p:nvPr/>
         </p:nvSpPr>
@@ -15688,7 +14768,7 @@
       </p:sp>
       <p:pic>
         <p:nvPicPr>
-          <p:cNvPr id="1404175325" name="Image 6" descr="preencoded.png"/>
+          <p:cNvPr id="2041780911" name="Image 6" descr="preencoded.png"/>
           <p:cNvPicPr>
             <a:picLocks noChangeAspect="1"/>
           </p:cNvPicPr>
@@ -15710,7 +14790,7 @@
       </p:pic>
       <p:sp>
         <p:nvSpPr>
-          <p:cNvPr id="406888418" name="Shape 12"/>
+          <p:cNvPr id="1356347948" name="Shape 12"/>
           <p:cNvSpPr/>
           <p:nvPr/>
         </p:nvSpPr>
@@ -15754,7 +14834,7 @@
       </p:sp>
       <p:pic>
         <p:nvPicPr>
-          <p:cNvPr id="239130974" name="Image 7" descr="preencoded.png"/>
+          <p:cNvPr id="1169455187" name="Image 7" descr="preencoded.png"/>
           <p:cNvPicPr>
             <a:picLocks noChangeAspect="1"/>
           </p:cNvPicPr>
@@ -15776,7 +14856,7 @@
       </p:pic>
       <p:sp>
         <p:nvSpPr>
-          <p:cNvPr id="1819880981" name="Text 13"/>
+          <p:cNvPr id="597959513" name="Text 13"/>
           <p:cNvSpPr/>
           <p:nvPr/>
         </p:nvSpPr>
@@ -15820,7 +14900,7 @@
       </p:sp>
       <p:sp>
         <p:nvSpPr>
-          <p:cNvPr id="903342570" name="Text 14"/>
+          <p:cNvPr id="1127967146" name="Text 14"/>
           <p:cNvSpPr/>
           <p:nvPr/>
         </p:nvSpPr>
@@ -15864,7 +14944,7 @@
       </p:sp>
       <p:sp>
         <p:nvSpPr>
-          <p:cNvPr id="510521189" name="Text 17"/>
+          <p:cNvPr id="1639703325" name="Text 17"/>
           <p:cNvSpPr/>
           <p:nvPr/>
         </p:nvSpPr>
@@ -15908,7 +14988,7 @@
       </p:sp>
       <p:sp>
         <p:nvSpPr>
-          <p:cNvPr id="1661143304" name="Text 18"/>
+          <p:cNvPr id="1912683294" name="Text 18"/>
           <p:cNvSpPr/>
           <p:nvPr/>
         </p:nvSpPr>
@@ -15992,7 +15072,7 @@
       </p:grpSpPr>
       <p:sp>
         <p:nvSpPr>
-          <p:cNvPr id="50762419" name="Text 0"/>
+          <p:cNvPr id="418940232" name="Text 0"/>
           <p:cNvSpPr/>
           <p:nvPr/>
         </p:nvSpPr>
@@ -16032,7 +15112,7 @@
       </p:sp>
       <p:sp>
         <p:nvSpPr>
-          <p:cNvPr id="1146539328" name="Text 1"/>
+          <p:cNvPr id="995827798" name="Text 1"/>
           <p:cNvSpPr/>
           <p:nvPr/>
         </p:nvSpPr>
@@ -16072,7 +15152,7 @@
       </p:sp>
       <p:sp>
         <p:nvSpPr>
-          <p:cNvPr id="1528930944" name="Text 2"/>
+          <p:cNvPr id="1922198722" name="Text 2"/>
           <p:cNvSpPr/>
           <p:nvPr/>
         </p:nvSpPr>
@@ -16112,7 +15192,7 @@
       </p:sp>
       <p:sp>
         <p:nvSpPr>
-          <p:cNvPr id="1580200347" name="Shape 3"/>
+          <p:cNvPr id="769053854" name="Shape 3"/>
           <p:cNvSpPr/>
           <p:nvPr/>
         </p:nvSpPr>
@@ -16134,7 +15214,7 @@
       </p:sp>
       <p:pic>
         <p:nvPicPr>
-          <p:cNvPr id="1049513521" name="Image 0" descr="preencoded.png"/>
+          <p:cNvPr id="808999849" name="Image 0" descr="preencoded.png"/>
           <p:cNvPicPr>
             <a:picLocks noChangeAspect="1"/>
           </p:cNvPicPr>
@@ -16156,7 +15236,7 @@
       </p:pic>
       <p:sp>
         <p:nvSpPr>
-          <p:cNvPr id="520062781" name="Text 4"/>
+          <p:cNvPr id="2047207009" name="Text 4"/>
           <p:cNvSpPr/>
           <p:nvPr/>
         </p:nvSpPr>
@@ -16196,7 +15276,7 @@
       </p:sp>
       <p:sp>
         <p:nvSpPr>
-          <p:cNvPr id="1861465378" name="Text 5"/>
+          <p:cNvPr id="396602838" name="Text 5"/>
           <p:cNvSpPr/>
           <p:nvPr/>
         </p:nvSpPr>
@@ -16236,7 +15316,7 @@
       </p:sp>
       <p:sp>
         <p:nvSpPr>
-          <p:cNvPr id="1247471088" name="Shape 6"/>
+          <p:cNvPr id="446453171" name="Shape 6"/>
           <p:cNvSpPr/>
           <p:nvPr/>
         </p:nvSpPr>
@@ -16258,7 +15338,7 @@
       </p:sp>
       <p:pic>
         <p:nvPicPr>
-          <p:cNvPr id="149447851" name="Image 1" descr="preencoded.png"/>
+          <p:cNvPr id="981944591" name="Image 1" descr="preencoded.png"/>
           <p:cNvPicPr>
             <a:picLocks noChangeAspect="1"/>
           </p:cNvPicPr>
@@ -16280,7 +15360,7 @@
       </p:pic>
       <p:sp>
         <p:nvSpPr>
-          <p:cNvPr id="1840225367" name="Text 7"/>
+          <p:cNvPr id="1219326016" name="Text 7"/>
           <p:cNvSpPr/>
           <p:nvPr/>
         </p:nvSpPr>
@@ -16320,7 +15400,7 @@
       </p:sp>
       <p:sp>
         <p:nvSpPr>
-          <p:cNvPr id="786658564" name="Text 8"/>
+          <p:cNvPr id="98706028" name="Text 8"/>
           <p:cNvSpPr/>
           <p:nvPr/>
         </p:nvSpPr>
@@ -16360,7 +15440,7 @@
       </p:sp>
       <p:sp>
         <p:nvSpPr>
-          <p:cNvPr id="1391587931" name="Shape 9"/>
+          <p:cNvPr id="527058131" name="Shape 9"/>
           <p:cNvSpPr/>
           <p:nvPr/>
         </p:nvSpPr>
@@ -16382,7 +15462,7 @@
       </p:sp>
       <p:pic>
         <p:nvPicPr>
-          <p:cNvPr id="1968225763" name="Image 2" descr="preencoded.png"/>
+          <p:cNvPr id="1775564636" name="Image 2" descr="preencoded.png"/>
           <p:cNvPicPr>
             <a:picLocks noChangeAspect="1"/>
           </p:cNvPicPr>
@@ -16404,7 +15484,7 @@
       </p:pic>
       <p:sp>
         <p:nvSpPr>
-          <p:cNvPr id="285433843" name="Text 10"/>
+          <p:cNvPr id="823322379" name="Text 10"/>
           <p:cNvSpPr/>
           <p:nvPr/>
         </p:nvSpPr>
@@ -16444,7 +15524,7 @@
       </p:sp>
       <p:sp>
         <p:nvSpPr>
-          <p:cNvPr id="766374918" name="Text 11"/>
+          <p:cNvPr id="446396338" name="Text 11"/>
           <p:cNvSpPr/>
           <p:nvPr/>
         </p:nvSpPr>
@@ -16484,7 +15564,7 @@
       </p:sp>
       <p:sp>
         <p:nvSpPr>
-          <p:cNvPr id="1226238933" name="Shape 12"/>
+          <p:cNvPr id="1399196336" name="Shape 12"/>
           <p:cNvSpPr/>
           <p:nvPr/>
         </p:nvSpPr>
@@ -16506,7 +15586,7 @@
       </p:sp>
       <p:pic>
         <p:nvPicPr>
-          <p:cNvPr id="1186016828" name="Image 3" descr="preencoded.png"/>
+          <p:cNvPr id="746934330" name="Image 3" descr="preencoded.png"/>
           <p:cNvPicPr>
             <a:picLocks noChangeAspect="1"/>
           </p:cNvPicPr>
@@ -16528,7 +15608,7 @@
       </p:pic>
       <p:sp>
         <p:nvSpPr>
-          <p:cNvPr id="1733271952" name="Text 13"/>
+          <p:cNvPr id="122741383" name="Text 13"/>
           <p:cNvSpPr/>
           <p:nvPr/>
         </p:nvSpPr>
@@ -16568,7 +15648,7 @@
       </p:sp>
       <p:sp>
         <p:nvSpPr>
-          <p:cNvPr id="1261477845" name="Text 14"/>
+          <p:cNvPr id="1070686316" name="Text 14"/>
           <p:cNvSpPr/>
           <p:nvPr/>
         </p:nvSpPr>
@@ -16608,7 +15688,7 @@
       </p:sp>
       <p:sp>
         <p:nvSpPr>
-          <p:cNvPr id="511415890" name="Shape 15"/>
+          <p:cNvPr id="387312840" name="Shape 15"/>
           <p:cNvSpPr/>
           <p:nvPr/>
         </p:nvSpPr>
@@ -16630,7 +15710,7 @@
       </p:sp>
       <p:pic>
         <p:nvPicPr>
-          <p:cNvPr id="1284990283" name="Image 4" descr="preencoded.png"/>
+          <p:cNvPr id="1262575281" name="Image 4" descr="preencoded.png"/>
           <p:cNvPicPr>
             <a:picLocks noChangeAspect="1"/>
           </p:cNvPicPr>
@@ -16652,7 +15732,7 @@
       </p:pic>
       <p:sp>
         <p:nvSpPr>
-          <p:cNvPr id="72923082" name="Text 16"/>
+          <p:cNvPr id="1914197402" name="Text 16"/>
           <p:cNvSpPr/>
           <p:nvPr/>
         </p:nvSpPr>
@@ -16692,7 +15772,7 @@
       </p:sp>
       <p:sp>
         <p:nvSpPr>
-          <p:cNvPr id="2055294483" name="Text 17"/>
+          <p:cNvPr id="428277372" name="Text 17"/>
           <p:cNvSpPr/>
           <p:nvPr/>
         </p:nvSpPr>
@@ -16732,7 +15812,7 @@
       </p:sp>
       <p:sp>
         <p:nvSpPr>
-          <p:cNvPr id="930851749" name="Shape 18"/>
+          <p:cNvPr id="323826770" name="Shape 18"/>
           <p:cNvSpPr/>
           <p:nvPr/>
         </p:nvSpPr>
@@ -16754,7 +15834,7 @@
       </p:sp>
       <p:pic>
         <p:nvPicPr>
-          <p:cNvPr id="254998492" name="Image 5" descr="preencoded.png"/>
+          <p:cNvPr id="596818938" name="Image 5" descr="preencoded.png"/>
           <p:cNvPicPr>
             <a:picLocks noChangeAspect="1"/>
           </p:cNvPicPr>
@@ -16776,7 +15856,7 @@
       </p:pic>
       <p:sp>
         <p:nvSpPr>
-          <p:cNvPr id="1708687592" name="Text 19"/>
+          <p:cNvPr id="19641461" name="Text 19"/>
           <p:cNvSpPr/>
           <p:nvPr/>
         </p:nvSpPr>
@@ -16816,7 +15896,7 @@
       </p:sp>
       <p:sp>
         <p:nvSpPr>
-          <p:cNvPr id="2072414430" name="Text 20"/>
+          <p:cNvPr id="1394242724" name="Text 20"/>
           <p:cNvSpPr/>
           <p:nvPr/>
         </p:nvSpPr>
@@ -16856,7 +15936,7 @@
       </p:sp>
       <p:sp>
         <p:nvSpPr>
-          <p:cNvPr id="159044846" name="Shape 21"/>
+          <p:cNvPr id="1888662110" name="Shape 21"/>
           <p:cNvSpPr/>
           <p:nvPr/>
         </p:nvSpPr>
@@ -16878,7 +15958,7 @@
       </p:sp>
       <p:pic>
         <p:nvPicPr>
-          <p:cNvPr id="317290545" name="Image 6" descr="preencoded.png"/>
+          <p:cNvPr id="32456712" name="Image 6" descr="preencoded.png"/>
           <p:cNvPicPr>
             <a:picLocks noChangeAspect="1"/>
           </p:cNvPicPr>
@@ -16900,7 +15980,7 @@
       </p:pic>
       <p:sp>
         <p:nvSpPr>
-          <p:cNvPr id="1250091510" name="Text 22"/>
+          <p:cNvPr id="935408111" name="Text 22"/>
           <p:cNvSpPr/>
           <p:nvPr/>
         </p:nvSpPr>
@@ -16940,7 +16020,7 @@
       </p:sp>
       <p:sp>
         <p:nvSpPr>
-          <p:cNvPr id="147363176" name="Text 23"/>
+          <p:cNvPr id="685073400" name="Text 23"/>
           <p:cNvSpPr/>
           <p:nvPr/>
         </p:nvSpPr>
@@ -16980,7 +16060,7 @@
       </p:sp>
       <p:sp>
         <p:nvSpPr>
-          <p:cNvPr id="1872626150" name="Shape 24"/>
+          <p:cNvPr id="220321909" name="Shape 24"/>
           <p:cNvSpPr/>
           <p:nvPr/>
         </p:nvSpPr>
@@ -17002,7 +16082,7 @@
       </p:sp>
       <p:pic>
         <p:nvPicPr>
-          <p:cNvPr id="2021782372" name="Image 7" descr="preencoded.png"/>
+          <p:cNvPr id="1777566463" name="Image 7" descr="preencoded.png"/>
           <p:cNvPicPr>
             <a:picLocks noChangeAspect="1"/>
           </p:cNvPicPr>
@@ -17024,7 +16104,7 @@
       </p:pic>
       <p:sp>
         <p:nvSpPr>
-          <p:cNvPr id="1803481654" name="Text 25"/>
+          <p:cNvPr id="1742140945" name="Text 25"/>
           <p:cNvSpPr/>
           <p:nvPr/>
         </p:nvSpPr>
@@ -17064,7 +16144,7 @@
       </p:sp>
       <p:sp>
         <p:nvSpPr>
-          <p:cNvPr id="211027697" name="Text 26"/>
+          <p:cNvPr id="254856587" name="Text 26"/>
           <p:cNvSpPr/>
           <p:nvPr/>
         </p:nvSpPr>
@@ -17104,7 +16184,7 @@
       </p:sp>
       <p:sp>
         <p:nvSpPr>
-          <p:cNvPr id="226169403" name="Shape 27"/>
+          <p:cNvPr id="701855803" name="Shape 27"/>
           <p:cNvSpPr/>
           <p:nvPr/>
         </p:nvSpPr>
@@ -17126,7 +16206,7 @@
       </p:sp>
       <p:pic>
         <p:nvPicPr>
-          <p:cNvPr id="1090237273" name="Image 8" descr="preencoded.png"/>
+          <p:cNvPr id="344338569" name="Image 8" descr="preencoded.png"/>
           <p:cNvPicPr>
             <a:picLocks noChangeAspect="1"/>
           </p:cNvPicPr>
@@ -17148,7 +16228,7 @@
       </p:pic>
       <p:sp>
         <p:nvSpPr>
-          <p:cNvPr id="1606319382" name="Text 28"/>
+          <p:cNvPr id="1567253487" name="Text 28"/>
           <p:cNvSpPr/>
           <p:nvPr/>
         </p:nvSpPr>
@@ -17188,7 +16268,7 @@
       </p:sp>
       <p:sp>
         <p:nvSpPr>
-          <p:cNvPr id="1565891429" name="Text 29"/>
+          <p:cNvPr id="79911592" name="Text 29"/>
           <p:cNvSpPr/>
           <p:nvPr/>
         </p:nvSpPr>
@@ -17228,7 +16308,7 @@
       </p:sp>
       <p:sp>
         <p:nvSpPr>
-          <p:cNvPr id="1309198381" name="Text 30"/>
+          <p:cNvPr id="787974724" name="Text 30"/>
           <p:cNvSpPr/>
           <p:nvPr/>
         </p:nvSpPr>
@@ -17268,7 +16348,7 @@
       </p:sp>
       <p:sp>
         <p:nvSpPr>
-          <p:cNvPr id="322716749" name="Text 31"/>
+          <p:cNvPr id="1826042092" name="Text 31"/>
           <p:cNvSpPr/>
           <p:nvPr/>
         </p:nvSpPr>
@@ -17348,7 +16428,7 @@
       </p:grpSpPr>
       <p:sp>
         <p:nvSpPr>
-          <p:cNvPr id="1575481192" name="Text 0"/>
+          <p:cNvPr id="622854892" name="Text 0"/>
           <p:cNvSpPr/>
           <p:nvPr/>
         </p:nvSpPr>
@@ -17388,7 +16468,7 @@
       </p:sp>
       <p:sp>
         <p:nvSpPr>
-          <p:cNvPr id="221161836" name="Text 1"/>
+          <p:cNvPr id="2140740066" name="Text 1"/>
           <p:cNvSpPr/>
           <p:nvPr/>
         </p:nvSpPr>
@@ -17428,7 +16508,7 @@
       </p:sp>
       <p:sp>
         <p:nvSpPr>
-          <p:cNvPr id="2090544013" name="Text 2"/>
+          <p:cNvPr id="1244641212" name="Text 2"/>
           <p:cNvSpPr/>
           <p:nvPr/>
         </p:nvSpPr>
@@ -17468,7 +16548,7 @@
       </p:sp>
       <p:sp>
         <p:nvSpPr>
-          <p:cNvPr id="1969890783" name="Shape 3"/>
+          <p:cNvPr id="1409925963" name="Shape 3"/>
           <p:cNvSpPr/>
           <p:nvPr/>
         </p:nvSpPr>
@@ -17495,7 +16575,7 @@
       </p:sp>
       <p:pic>
         <p:nvPicPr>
-          <p:cNvPr id="1436658091" name="Image 0" descr="preencoded.png"/>
+          <p:cNvPr id="352102322" name="Image 0" descr="preencoded.png"/>
           <p:cNvPicPr>
             <a:picLocks noChangeAspect="1"/>
           </p:cNvPicPr>
@@ -17517,7 +16597,7 @@
       </p:pic>
       <p:sp>
         <p:nvSpPr>
-          <p:cNvPr id="1221807148" name="Text 4"/>
+          <p:cNvPr id="668537240" name="Text 4"/>
           <p:cNvSpPr/>
           <p:nvPr/>
         </p:nvSpPr>
@@ -17557,7 +16637,7 @@
       </p:sp>
       <p:sp>
         <p:nvSpPr>
-          <p:cNvPr id="2139658886" name="Text 5"/>
+          <p:cNvPr id="1207540970" name="Text 5"/>
           <p:cNvSpPr/>
           <p:nvPr/>
         </p:nvSpPr>
@@ -17597,7 +16677,7 @@
       </p:sp>
       <p:sp>
         <p:nvSpPr>
-          <p:cNvPr id="374891188" name="Shape 6"/>
+          <p:cNvPr id="2033276191" name="Shape 6"/>
           <p:cNvSpPr/>
           <p:nvPr/>
         </p:nvSpPr>
@@ -17624,7 +16704,7 @@
       </p:sp>
       <p:pic>
         <p:nvPicPr>
-          <p:cNvPr id="1829819834" name="Image 1" descr="preencoded.png"/>
+          <p:cNvPr id="1154701255" name="Image 1" descr="preencoded.png"/>
           <p:cNvPicPr>
             <a:picLocks noChangeAspect="1"/>
           </p:cNvPicPr>
@@ -17646,7 +16726,7 @@
       </p:pic>
       <p:sp>
         <p:nvSpPr>
-          <p:cNvPr id="170017030" name="Text 7"/>
+          <p:cNvPr id="1691739144" name="Text 7"/>
           <p:cNvSpPr/>
           <p:nvPr/>
         </p:nvSpPr>
@@ -17686,7 +16766,7 @@
       </p:sp>
       <p:sp>
         <p:nvSpPr>
-          <p:cNvPr id="43016490" name="Text 8"/>
+          <p:cNvPr id="857924208" name="Text 8"/>
           <p:cNvSpPr/>
           <p:nvPr/>
         </p:nvSpPr>
@@ -17726,7 +16806,7 @@
       </p:sp>
       <p:sp>
         <p:nvSpPr>
-          <p:cNvPr id="1010882259" name="Shape 9"/>
+          <p:cNvPr id="912687309" name="Shape 9"/>
           <p:cNvSpPr/>
           <p:nvPr/>
         </p:nvSpPr>
@@ -17753,7 +16833,7 @@
       </p:sp>
       <p:pic>
         <p:nvPicPr>
-          <p:cNvPr id="1204364165" name="Image 2" descr="preencoded.png"/>
+          <p:cNvPr id="1620224321" name="Image 2" descr="preencoded.png"/>
           <p:cNvPicPr>
             <a:picLocks noChangeAspect="1"/>
           </p:cNvPicPr>
@@ -17775,7 +16855,7 @@
       </p:pic>
       <p:sp>
         <p:nvSpPr>
-          <p:cNvPr id="752043505" name="Text 10"/>
+          <p:cNvPr id="885267430" name="Text 10"/>
           <p:cNvSpPr/>
           <p:nvPr/>
         </p:nvSpPr>
@@ -17815,7 +16895,7 @@
       </p:sp>
       <p:sp>
         <p:nvSpPr>
-          <p:cNvPr id="1330202581" name="Text 11"/>
+          <p:cNvPr id="1939986368" name="Text 11"/>
           <p:cNvSpPr/>
           <p:nvPr/>
         </p:nvSpPr>
@@ -17855,7 +16935,7 @@
       </p:sp>
       <p:sp>
         <p:nvSpPr>
-          <p:cNvPr id="452553437" name="Shape 12"/>
+          <p:cNvPr id="864807101" name="Shape 12"/>
           <p:cNvSpPr/>
           <p:nvPr/>
         </p:nvSpPr>
@@ -17882,7 +16962,7 @@
       </p:sp>
       <p:pic>
         <p:nvPicPr>
-          <p:cNvPr id="767919326" name="Image 3" descr="preencoded.png"/>
+          <p:cNvPr id="714990679" name="Image 3" descr="preencoded.png"/>
           <p:cNvPicPr>
             <a:picLocks noChangeAspect="1"/>
           </p:cNvPicPr>
@@ -17904,7 +16984,7 @@
       </p:pic>
       <p:sp>
         <p:nvSpPr>
-          <p:cNvPr id="2096795288" name="Text 13"/>
+          <p:cNvPr id="2059462802" name="Text 13"/>
           <p:cNvSpPr/>
           <p:nvPr/>
         </p:nvSpPr>
@@ -17944,7 +17024,7 @@
       </p:sp>
       <p:sp>
         <p:nvSpPr>
-          <p:cNvPr id="213171310" name="Text 14"/>
+          <p:cNvPr id="67378023" name="Text 14"/>
           <p:cNvSpPr/>
           <p:nvPr/>
         </p:nvSpPr>
@@ -17984,7 +17064,7 @@
       </p:sp>
       <p:sp>
         <p:nvSpPr>
-          <p:cNvPr id="475142842" name="Text 15"/>
+          <p:cNvPr id="575129056" name="Text 15"/>
           <p:cNvSpPr/>
           <p:nvPr/>
         </p:nvSpPr>
@@ -18024,7 +17104,7 @@
       </p:sp>
       <p:sp>
         <p:nvSpPr>
-          <p:cNvPr id="1722241751" name="Text 16"/>
+          <p:cNvPr id="571400676" name="Text 16"/>
           <p:cNvSpPr/>
           <p:nvPr/>
         </p:nvSpPr>
